--- a/article/figures/data_pipeline.pptx
+++ b/article/figures/data_pipeline.pptx
@@ -5,9 +5,9 @@
     <p:sldMasterId id="2147483648" r:id="rId1"/>
   </p:sldMasterIdLst>
   <p:sldIdLst>
-    <p:sldId id="256" r:id="rId7"/>
+    <p:sldId id="256" r:id="rId2"/>
   </p:sldIdLst>
-  <p:sldSz cx="12191695" cy="6858000" type="screen4x3"/>
+  <p:sldSz cx="12192000" cy="6858000"/>
   <p:notesSz cx="6858000" cy="9144000"/>
   <p:defaultTextStyle>
     <a:defPPr>
@@ -104,6 +104,22 @@
       </a:defRPr>
     </a:lvl9pPr>
   </p:defaultTextStyle>
+  <p:extLst>
+    <p:ext uri="{EFAFB233-063F-42B5-8137-9DF3F51BA10A}">
+      <p15:sldGuideLst xmlns:p15="http://schemas.microsoft.com/office/powerpoint/2012/main">
+        <p15:guide id="1" orient="horz" pos="2160">
+          <p15:clr>
+            <a:srgbClr val="A4A3A4"/>
+          </p15:clr>
+        </p15:guide>
+        <p15:guide id="2" pos="2880">
+          <p15:clr>
+            <a:srgbClr val="A4A3A4"/>
+          </p15:clr>
+        </p15:guide>
+      </p15:sldGuideLst>
+    </p:ext>
+  </p:extLst>
 </p:presentation>
 </file>
 
@@ -145,10 +161,9 @@
           <a:lstStyle/>
           <a:p>
             <a:r>
-              <a:rPr lang="en-US" smtClean="0"/>
+              <a:rPr lang="en-US"/>
               <a:t>Click to edit Master title style</a:t>
             </a:r>
-            <a:endParaRPr lang="en-US"/>
           </a:p>
         </p:txBody>
       </p:sp>
@@ -264,10 +279,9 @@
           </a:lstStyle>
           <a:p>
             <a:r>
-              <a:rPr lang="en-US" smtClean="0"/>
+              <a:rPr lang="en-US"/>
               <a:t>Click to edit Master subtitle style</a:t>
             </a:r>
-            <a:endParaRPr lang="en-US"/>
           </a:p>
         </p:txBody>
       </p:sp>
@@ -288,7 +302,7 @@
           <a:p>
             <a:fld id="{5BCAD085-E8A6-8845-BD4E-CB4CCA059FC4}" type="datetimeFigureOut">
               <a:rPr lang="en-US" smtClean="0"/>
-              <a:t>1/27/13</a:t>
+              <a:t>1/23/2026</a:t>
             </a:fld>
             <a:endParaRPr lang="en-US"/>
           </a:p>
@@ -382,10 +396,9 @@
           <a:lstStyle/>
           <a:p>
             <a:r>
-              <a:rPr lang="en-US" smtClean="0"/>
+              <a:rPr lang="en-US"/>
               <a:t>Click to edit Master title style</a:t>
             </a:r>
-            <a:endParaRPr lang="en-US"/>
           </a:p>
         </p:txBody>
       </p:sp>
@@ -406,38 +419,37 @@
           <a:p>
             <a:pPr lvl="0"/>
             <a:r>
-              <a:rPr lang="en-US" smtClean="0"/>
+              <a:rPr lang="en-US"/>
               <a:t>Click to edit Master text styles</a:t>
             </a:r>
           </a:p>
           <a:p>
             <a:pPr lvl="1"/>
             <a:r>
-              <a:rPr lang="en-US" smtClean="0"/>
+              <a:rPr lang="en-US"/>
               <a:t>Second level</a:t>
             </a:r>
           </a:p>
           <a:p>
             <a:pPr lvl="2"/>
             <a:r>
-              <a:rPr lang="en-US" smtClean="0"/>
+              <a:rPr lang="en-US"/>
               <a:t>Third level</a:t>
             </a:r>
           </a:p>
           <a:p>
             <a:pPr lvl="3"/>
             <a:r>
-              <a:rPr lang="en-US" smtClean="0"/>
+              <a:rPr lang="en-US"/>
               <a:t>Fourth level</a:t>
             </a:r>
           </a:p>
           <a:p>
             <a:pPr lvl="4"/>
             <a:r>
-              <a:rPr lang="en-US" smtClean="0"/>
+              <a:rPr lang="en-US"/>
               <a:t>Fifth level</a:t>
             </a:r>
-            <a:endParaRPr lang="en-US"/>
           </a:p>
         </p:txBody>
       </p:sp>
@@ -458,7 +470,7 @@
           <a:p>
             <a:fld id="{5BCAD085-E8A6-8845-BD4E-CB4CCA059FC4}" type="datetimeFigureOut">
               <a:rPr lang="en-US" smtClean="0"/>
-              <a:t>1/27/13</a:t>
+              <a:t>1/23/2026</a:t>
             </a:fld>
             <a:endParaRPr lang="en-US"/>
           </a:p>
@@ -557,10 +569,9 @@
           <a:lstStyle/>
           <a:p>
             <a:r>
-              <a:rPr lang="en-US" smtClean="0"/>
+              <a:rPr lang="en-US"/>
               <a:t>Click to edit Master title style</a:t>
             </a:r>
-            <a:endParaRPr lang="en-US"/>
           </a:p>
         </p:txBody>
       </p:sp>
@@ -586,38 +597,37 @@
           <a:p>
             <a:pPr lvl="0"/>
             <a:r>
-              <a:rPr lang="en-US" smtClean="0"/>
+              <a:rPr lang="en-US"/>
               <a:t>Click to edit Master text styles</a:t>
             </a:r>
           </a:p>
           <a:p>
             <a:pPr lvl="1"/>
             <a:r>
-              <a:rPr lang="en-US" smtClean="0"/>
+              <a:rPr lang="en-US"/>
               <a:t>Second level</a:t>
             </a:r>
           </a:p>
           <a:p>
             <a:pPr lvl="2"/>
             <a:r>
-              <a:rPr lang="en-US" smtClean="0"/>
+              <a:rPr lang="en-US"/>
               <a:t>Third level</a:t>
             </a:r>
           </a:p>
           <a:p>
             <a:pPr lvl="3"/>
             <a:r>
-              <a:rPr lang="en-US" smtClean="0"/>
+              <a:rPr lang="en-US"/>
               <a:t>Fourth level</a:t>
             </a:r>
           </a:p>
           <a:p>
             <a:pPr lvl="4"/>
             <a:r>
-              <a:rPr lang="en-US" smtClean="0"/>
+              <a:rPr lang="en-US"/>
               <a:t>Fifth level</a:t>
             </a:r>
-            <a:endParaRPr lang="en-US"/>
           </a:p>
         </p:txBody>
       </p:sp>
@@ -638,7 +648,7 @@
           <a:p>
             <a:fld id="{5BCAD085-E8A6-8845-BD4E-CB4CCA059FC4}" type="datetimeFigureOut">
               <a:rPr lang="en-US" smtClean="0"/>
-              <a:t>1/27/13</a:t>
+              <a:t>1/23/2026</a:t>
             </a:fld>
             <a:endParaRPr lang="en-US"/>
           </a:p>
@@ -732,10 +742,9 @@
           <a:lstStyle/>
           <a:p>
             <a:r>
-              <a:rPr lang="en-US" smtClean="0"/>
+              <a:rPr lang="en-US"/>
               <a:t>Click to edit Master title style</a:t>
             </a:r>
-            <a:endParaRPr lang="en-US"/>
           </a:p>
         </p:txBody>
       </p:sp>
@@ -756,38 +765,37 @@
           <a:p>
             <a:pPr lvl="0"/>
             <a:r>
-              <a:rPr lang="en-US" smtClean="0"/>
+              <a:rPr lang="en-US"/>
               <a:t>Click to edit Master text styles</a:t>
             </a:r>
           </a:p>
           <a:p>
             <a:pPr lvl="1"/>
             <a:r>
-              <a:rPr lang="en-US" smtClean="0"/>
+              <a:rPr lang="en-US"/>
               <a:t>Second level</a:t>
             </a:r>
           </a:p>
           <a:p>
             <a:pPr lvl="2"/>
             <a:r>
-              <a:rPr lang="en-US" smtClean="0"/>
+              <a:rPr lang="en-US"/>
               <a:t>Third level</a:t>
             </a:r>
           </a:p>
           <a:p>
             <a:pPr lvl="3"/>
             <a:r>
-              <a:rPr lang="en-US" smtClean="0"/>
+              <a:rPr lang="en-US"/>
               <a:t>Fourth level</a:t>
             </a:r>
           </a:p>
           <a:p>
             <a:pPr lvl="4"/>
             <a:r>
-              <a:rPr lang="en-US" smtClean="0"/>
+              <a:rPr lang="en-US"/>
               <a:t>Fifth level</a:t>
             </a:r>
-            <a:endParaRPr lang="en-US"/>
           </a:p>
         </p:txBody>
       </p:sp>
@@ -808,7 +816,7 @@
           <a:p>
             <a:fld id="{5BCAD085-E8A6-8845-BD4E-CB4CCA059FC4}" type="datetimeFigureOut">
               <a:rPr lang="en-US" smtClean="0"/>
-              <a:t>1/27/13</a:t>
+              <a:t>1/23/2026</a:t>
             </a:fld>
             <a:endParaRPr lang="en-US"/>
           </a:p>
@@ -911,10 +919,9 @@
           </a:lstStyle>
           <a:p>
             <a:r>
-              <a:rPr lang="en-US" smtClean="0"/>
+              <a:rPr lang="en-US"/>
               <a:t>Click to edit Master title style</a:t>
             </a:r>
-            <a:endParaRPr lang="en-US"/>
           </a:p>
         </p:txBody>
       </p:sp>
@@ -1031,7 +1038,7 @@
           <a:p>
             <a:pPr lvl="0"/>
             <a:r>
-              <a:rPr lang="en-US" smtClean="0"/>
+              <a:rPr lang="en-US"/>
               <a:t>Click to edit Master text styles</a:t>
             </a:r>
           </a:p>
@@ -1054,7 +1061,7 @@
           <a:p>
             <a:fld id="{5BCAD085-E8A6-8845-BD4E-CB4CCA059FC4}" type="datetimeFigureOut">
               <a:rPr lang="en-US" smtClean="0"/>
-              <a:t>1/27/13</a:t>
+              <a:t>1/23/2026</a:t>
             </a:fld>
             <a:endParaRPr lang="en-US"/>
           </a:p>
@@ -1148,10 +1155,9 @@
           <a:lstStyle/>
           <a:p>
             <a:r>
-              <a:rPr lang="en-US" smtClean="0"/>
+              <a:rPr lang="en-US"/>
               <a:t>Click to edit Master title style</a:t>
             </a:r>
-            <a:endParaRPr lang="en-US"/>
           </a:p>
         </p:txBody>
       </p:sp>
@@ -1205,38 +1211,37 @@
           <a:p>
             <a:pPr lvl="0"/>
             <a:r>
-              <a:rPr lang="en-US" smtClean="0"/>
+              <a:rPr lang="en-US"/>
               <a:t>Click to edit Master text styles</a:t>
             </a:r>
           </a:p>
           <a:p>
             <a:pPr lvl="1"/>
             <a:r>
-              <a:rPr lang="en-US" smtClean="0"/>
+              <a:rPr lang="en-US"/>
               <a:t>Second level</a:t>
             </a:r>
           </a:p>
           <a:p>
             <a:pPr lvl="2"/>
             <a:r>
-              <a:rPr lang="en-US" smtClean="0"/>
+              <a:rPr lang="en-US"/>
               <a:t>Third level</a:t>
             </a:r>
           </a:p>
           <a:p>
             <a:pPr lvl="3"/>
             <a:r>
-              <a:rPr lang="en-US" smtClean="0"/>
+              <a:rPr lang="en-US"/>
               <a:t>Fourth level</a:t>
             </a:r>
           </a:p>
           <a:p>
             <a:pPr lvl="4"/>
             <a:r>
-              <a:rPr lang="en-US" smtClean="0"/>
+              <a:rPr lang="en-US"/>
               <a:t>Fifth level</a:t>
             </a:r>
-            <a:endParaRPr lang="en-US"/>
           </a:p>
         </p:txBody>
       </p:sp>
@@ -1290,38 +1295,37 @@
           <a:p>
             <a:pPr lvl="0"/>
             <a:r>
-              <a:rPr lang="en-US" smtClean="0"/>
+              <a:rPr lang="en-US"/>
               <a:t>Click to edit Master text styles</a:t>
             </a:r>
           </a:p>
           <a:p>
             <a:pPr lvl="1"/>
             <a:r>
-              <a:rPr lang="en-US" smtClean="0"/>
+              <a:rPr lang="en-US"/>
               <a:t>Second level</a:t>
             </a:r>
           </a:p>
           <a:p>
             <a:pPr lvl="2"/>
             <a:r>
-              <a:rPr lang="en-US" smtClean="0"/>
+              <a:rPr lang="en-US"/>
               <a:t>Third level</a:t>
             </a:r>
           </a:p>
           <a:p>
             <a:pPr lvl="3"/>
             <a:r>
-              <a:rPr lang="en-US" smtClean="0"/>
+              <a:rPr lang="en-US"/>
               <a:t>Fourth level</a:t>
             </a:r>
           </a:p>
           <a:p>
             <a:pPr lvl="4"/>
             <a:r>
-              <a:rPr lang="en-US" smtClean="0"/>
+              <a:rPr lang="en-US"/>
               <a:t>Fifth level</a:t>
             </a:r>
-            <a:endParaRPr lang="en-US"/>
           </a:p>
         </p:txBody>
       </p:sp>
@@ -1342,7 +1346,7 @@
           <a:p>
             <a:fld id="{5BCAD085-E8A6-8845-BD4E-CB4CCA059FC4}" type="datetimeFigureOut">
               <a:rPr lang="en-US" smtClean="0"/>
-              <a:t>1/27/13</a:t>
+              <a:t>1/23/2026</a:t>
             </a:fld>
             <a:endParaRPr lang="en-US"/>
           </a:p>
@@ -1440,10 +1444,9 @@
           </a:lstStyle>
           <a:p>
             <a:r>
-              <a:rPr lang="en-US" smtClean="0"/>
+              <a:rPr lang="en-US"/>
               <a:t>Click to edit Master title style</a:t>
             </a:r>
-            <a:endParaRPr lang="en-US"/>
           </a:p>
         </p:txBody>
       </p:sp>
@@ -1506,7 +1509,7 @@
           <a:p>
             <a:pPr lvl="0"/>
             <a:r>
-              <a:rPr lang="en-US" smtClean="0"/>
+              <a:rPr lang="en-US"/>
               <a:t>Click to edit Master text styles</a:t>
             </a:r>
           </a:p>
@@ -1562,38 +1565,37 @@
           <a:p>
             <a:pPr lvl="0"/>
             <a:r>
-              <a:rPr lang="en-US" smtClean="0"/>
+              <a:rPr lang="en-US"/>
               <a:t>Click to edit Master text styles</a:t>
             </a:r>
           </a:p>
           <a:p>
             <a:pPr lvl="1"/>
             <a:r>
-              <a:rPr lang="en-US" smtClean="0"/>
+              <a:rPr lang="en-US"/>
               <a:t>Second level</a:t>
             </a:r>
           </a:p>
           <a:p>
             <a:pPr lvl="2"/>
             <a:r>
-              <a:rPr lang="en-US" smtClean="0"/>
+              <a:rPr lang="en-US"/>
               <a:t>Third level</a:t>
             </a:r>
           </a:p>
           <a:p>
             <a:pPr lvl="3"/>
             <a:r>
-              <a:rPr lang="en-US" smtClean="0"/>
+              <a:rPr lang="en-US"/>
               <a:t>Fourth level</a:t>
             </a:r>
           </a:p>
           <a:p>
             <a:pPr lvl="4"/>
             <a:r>
-              <a:rPr lang="en-US" smtClean="0"/>
+              <a:rPr lang="en-US"/>
               <a:t>Fifth level</a:t>
             </a:r>
-            <a:endParaRPr lang="en-US"/>
           </a:p>
         </p:txBody>
       </p:sp>
@@ -1656,7 +1658,7 @@
           <a:p>
             <a:pPr lvl="0"/>
             <a:r>
-              <a:rPr lang="en-US" smtClean="0"/>
+              <a:rPr lang="en-US"/>
               <a:t>Click to edit Master text styles</a:t>
             </a:r>
           </a:p>
@@ -1712,38 +1714,37 @@
           <a:p>
             <a:pPr lvl="0"/>
             <a:r>
-              <a:rPr lang="en-US" smtClean="0"/>
+              <a:rPr lang="en-US"/>
               <a:t>Click to edit Master text styles</a:t>
             </a:r>
           </a:p>
           <a:p>
             <a:pPr lvl="1"/>
             <a:r>
-              <a:rPr lang="en-US" smtClean="0"/>
+              <a:rPr lang="en-US"/>
               <a:t>Second level</a:t>
             </a:r>
           </a:p>
           <a:p>
             <a:pPr lvl="2"/>
             <a:r>
-              <a:rPr lang="en-US" smtClean="0"/>
+              <a:rPr lang="en-US"/>
               <a:t>Third level</a:t>
             </a:r>
           </a:p>
           <a:p>
             <a:pPr lvl="3"/>
             <a:r>
-              <a:rPr lang="en-US" smtClean="0"/>
+              <a:rPr lang="en-US"/>
               <a:t>Fourth level</a:t>
             </a:r>
           </a:p>
           <a:p>
             <a:pPr lvl="4"/>
             <a:r>
-              <a:rPr lang="en-US" smtClean="0"/>
+              <a:rPr lang="en-US"/>
               <a:t>Fifth level</a:t>
             </a:r>
-            <a:endParaRPr lang="en-US"/>
           </a:p>
         </p:txBody>
       </p:sp>
@@ -1764,7 +1765,7 @@
           <a:p>
             <a:fld id="{5BCAD085-E8A6-8845-BD4E-CB4CCA059FC4}" type="datetimeFigureOut">
               <a:rPr lang="en-US" smtClean="0"/>
-              <a:t>1/27/13</a:t>
+              <a:t>1/23/2026</a:t>
             </a:fld>
             <a:endParaRPr lang="en-US"/>
           </a:p>
@@ -1858,10 +1859,9 @@
           <a:lstStyle/>
           <a:p>
             <a:r>
-              <a:rPr lang="en-US" smtClean="0"/>
+              <a:rPr lang="en-US"/>
               <a:t>Click to edit Master title style</a:t>
             </a:r>
-            <a:endParaRPr lang="en-US"/>
           </a:p>
         </p:txBody>
       </p:sp>
@@ -1882,7 +1882,7 @@
           <a:p>
             <a:fld id="{5BCAD085-E8A6-8845-BD4E-CB4CCA059FC4}" type="datetimeFigureOut">
               <a:rPr lang="en-US" smtClean="0"/>
-              <a:t>1/27/13</a:t>
+              <a:t>1/23/2026</a:t>
             </a:fld>
             <a:endParaRPr lang="en-US"/>
           </a:p>
@@ -1977,7 +1977,7 @@
           <a:p>
             <a:fld id="{5BCAD085-E8A6-8845-BD4E-CB4CCA059FC4}" type="datetimeFigureOut">
               <a:rPr lang="en-US" smtClean="0"/>
-              <a:t>1/27/13</a:t>
+              <a:t>1/23/2026</a:t>
             </a:fld>
             <a:endParaRPr lang="en-US"/>
           </a:p>
@@ -2080,10 +2080,9 @@
           </a:lstStyle>
           <a:p>
             <a:r>
-              <a:rPr lang="en-US" smtClean="0"/>
+              <a:rPr lang="en-US"/>
               <a:t>Click to edit Master title style</a:t>
             </a:r>
-            <a:endParaRPr lang="en-US"/>
           </a:p>
         </p:txBody>
       </p:sp>
@@ -2137,38 +2136,37 @@
           <a:p>
             <a:pPr lvl="0"/>
             <a:r>
-              <a:rPr lang="en-US" smtClean="0"/>
+              <a:rPr lang="en-US"/>
               <a:t>Click to edit Master text styles</a:t>
             </a:r>
           </a:p>
           <a:p>
             <a:pPr lvl="1"/>
             <a:r>
-              <a:rPr lang="en-US" smtClean="0"/>
+              <a:rPr lang="en-US"/>
               <a:t>Second level</a:t>
             </a:r>
           </a:p>
           <a:p>
             <a:pPr lvl="2"/>
             <a:r>
-              <a:rPr lang="en-US" smtClean="0"/>
+              <a:rPr lang="en-US"/>
               <a:t>Third level</a:t>
             </a:r>
           </a:p>
           <a:p>
             <a:pPr lvl="3"/>
             <a:r>
-              <a:rPr lang="en-US" smtClean="0"/>
+              <a:rPr lang="en-US"/>
               <a:t>Fourth level</a:t>
             </a:r>
           </a:p>
           <a:p>
             <a:pPr lvl="4"/>
             <a:r>
-              <a:rPr lang="en-US" smtClean="0"/>
+              <a:rPr lang="en-US"/>
               <a:t>Fifth level</a:t>
             </a:r>
-            <a:endParaRPr lang="en-US"/>
           </a:p>
         </p:txBody>
       </p:sp>
@@ -2231,7 +2229,7 @@
           <a:p>
             <a:pPr lvl="0"/>
             <a:r>
-              <a:rPr lang="en-US" smtClean="0"/>
+              <a:rPr lang="en-US"/>
               <a:t>Click to edit Master text styles</a:t>
             </a:r>
           </a:p>
@@ -2254,7 +2252,7 @@
           <a:p>
             <a:fld id="{5BCAD085-E8A6-8845-BD4E-CB4CCA059FC4}" type="datetimeFigureOut">
               <a:rPr lang="en-US" smtClean="0"/>
-              <a:t>1/27/13</a:t>
+              <a:t>1/23/2026</a:t>
             </a:fld>
             <a:endParaRPr lang="en-US"/>
           </a:p>
@@ -2357,10 +2355,9 @@
           </a:lstStyle>
           <a:p>
             <a:r>
-              <a:rPr lang="en-US" smtClean="0"/>
+              <a:rPr lang="en-US"/>
               <a:t>Click to edit Master title style</a:t>
             </a:r>
-            <a:endParaRPr lang="en-US"/>
           </a:p>
         </p:txBody>
       </p:sp>
@@ -2484,7 +2481,7 @@
           <a:p>
             <a:pPr lvl="0"/>
             <a:r>
-              <a:rPr lang="en-US" smtClean="0"/>
+              <a:rPr lang="en-US"/>
               <a:t>Click to edit Master text styles</a:t>
             </a:r>
           </a:p>
@@ -2507,7 +2504,7 @@
           <a:p>
             <a:fld id="{5BCAD085-E8A6-8845-BD4E-CB4CCA059FC4}" type="datetimeFigureOut">
               <a:rPr lang="en-US" smtClean="0"/>
-              <a:t>1/27/13</a:t>
+              <a:t>1/23/2026</a:t>
             </a:fld>
             <a:endParaRPr lang="en-US"/>
           </a:p>
@@ -2616,10 +2613,9 @@
           <a:lstStyle/>
           <a:p>
             <a:r>
-              <a:rPr lang="en-US" smtClean="0"/>
+              <a:rPr lang="en-US"/>
               <a:t>Click to edit Master title style</a:t>
             </a:r>
-            <a:endParaRPr lang="en-US"/>
           </a:p>
         </p:txBody>
       </p:sp>
@@ -2650,38 +2646,37 @@
           <a:p>
             <a:pPr lvl="0"/>
             <a:r>
-              <a:rPr lang="en-US" smtClean="0"/>
+              <a:rPr lang="en-US"/>
               <a:t>Click to edit Master text styles</a:t>
             </a:r>
           </a:p>
           <a:p>
             <a:pPr lvl="1"/>
             <a:r>
-              <a:rPr lang="en-US" smtClean="0"/>
+              <a:rPr lang="en-US"/>
               <a:t>Second level</a:t>
             </a:r>
           </a:p>
           <a:p>
             <a:pPr lvl="2"/>
             <a:r>
-              <a:rPr lang="en-US" smtClean="0"/>
+              <a:rPr lang="en-US"/>
               <a:t>Third level</a:t>
             </a:r>
           </a:p>
           <a:p>
             <a:pPr lvl="3"/>
             <a:r>
-              <a:rPr lang="en-US" smtClean="0"/>
+              <a:rPr lang="en-US"/>
               <a:t>Fourth level</a:t>
             </a:r>
           </a:p>
           <a:p>
             <a:pPr lvl="4"/>
             <a:r>
-              <a:rPr lang="en-US" smtClean="0"/>
+              <a:rPr lang="en-US"/>
               <a:t>Fifth level</a:t>
             </a:r>
-            <a:endParaRPr lang="en-US"/>
           </a:p>
         </p:txBody>
       </p:sp>
@@ -2720,7 +2715,7 @@
           <a:p>
             <a:fld id="{5BCAD085-E8A6-8845-BD4E-CB4CCA059FC4}" type="datetimeFigureOut">
               <a:rPr lang="en-US" smtClean="0"/>
-              <a:t>1/27/13</a:t>
+              <a:t>1/23/2026</a:t>
             </a:fld>
             <a:endParaRPr lang="en-US"/>
           </a:p>
@@ -3079,7 +3074,7 @@
 </file>
 
 <file path=ppt/slides/slide1.xml><?xml version="1.0" encoding="utf-8"?>
-<p:sld xmlns:a="http://schemas.openxmlformats.org/drawingml/2006/main" xmlns:p="http://schemas.openxmlformats.org/presentationml/2006/main" xmlns:r="http://schemas.openxmlformats.org/officeDocument/2006/relationships">
+<p:sld xmlns:a="http://schemas.openxmlformats.org/drawingml/2006/main" xmlns:r="http://schemas.openxmlformats.org/officeDocument/2006/relationships" xmlns:p="http://schemas.openxmlformats.org/presentationml/2006/main">
   <p:cSld>
     <p:spTree>
       <p:nvGrpSpPr>
@@ -3087,52 +3082,14 @@
         <p:cNvGrpSpPr/>
         <p:nvPr/>
       </p:nvGrpSpPr>
-      <p:grpSpPr/>
-      <p:sp>
-        <p:nvSpPr>
-          <p:cNvPr id="2" name="Rounded Rectangle 1"/>
-          <p:cNvSpPr/>
-          <p:nvPr/>
-        </p:nvSpPr>
-        <p:spPr>
-          <a:xfrm>
-            <a:off x="365760" y="411480"/>
-            <a:ext cx="2651760" cy="1417320"/>
-          </a:xfrm>
-          <a:prstGeom prst="roundRect">
-            <a:avLst/>
-          </a:prstGeom>
-          <a:solidFill>
-            <a:srgbClr val="F7F9FC"/>
-          </a:solidFill>
-          <a:ln w="15875">
-            <a:solidFill>
-              <a:srgbClr val="2C3E50"/>
-            </a:solidFill>
-          </a:ln>
-        </p:spPr>
-        <p:style>
-          <a:lnRef idx="1">
-            <a:schemeClr val="accent1"/>
-          </a:lnRef>
-          <a:fillRef idx="3">
-            <a:schemeClr val="accent1"/>
-          </a:fillRef>
-          <a:effectRef idx="2">
-            <a:schemeClr val="accent1"/>
-          </a:effectRef>
-          <a:fontRef idx="minor">
-            <a:schemeClr val="lt1"/>
-          </a:fontRef>
-        </p:style>
-        <p:txBody>
-          <a:bodyPr rtlCol="0" anchor="ctr"/>
-          <a:lstStyle/>
-          <a:p>
-            <a:pPr algn="ctr"/>
-          </a:p>
-        </p:txBody>
-      </p:sp>
+      <p:grpSpPr>
+        <a:xfrm>
+          <a:off x="0" y="0"/>
+          <a:ext cx="0" cy="0"/>
+          <a:chOff x="0" y="0"/>
+          <a:chExt cx="0" cy="0"/>
+        </a:xfrm>
+      </p:grpSpPr>
       <p:sp>
         <p:nvSpPr>
           <p:cNvPr id="3" name="Rounded Rectangle 2"/>
@@ -3141,8 +3098,8 @@
         </p:nvSpPr>
         <p:spPr>
           <a:xfrm>
-            <a:off x="365760" y="411480"/>
-            <a:ext cx="2651760" cy="311810"/>
+            <a:off x="238760" y="411480"/>
+            <a:ext cx="2778760" cy="311810"/>
           </a:xfrm>
           <a:prstGeom prst="roundRect">
             <a:avLst/>
@@ -3169,12 +3126,12 @@
           </a:fontRef>
         </p:style>
         <p:txBody>
-          <a:bodyPr rtlCol="0" anchor="ctr" lIns="127000" rIns="127000" tIns="76200" bIns="25400"/>
+          <a:bodyPr lIns="127000" tIns="76200" rIns="127000" bIns="25400" rtlCol="0" anchor="ctr"/>
           <a:lstStyle/>
           <a:p>
             <a:pPr algn="l"/>
             <a:r>
-              <a:rPr b="1" sz="1600">
+              <a:rPr b="1" dirty="0">
                 <a:solidFill>
                   <a:srgbClr val="FFFFFF"/>
                 </a:solidFill>
@@ -3186,116 +3143,21 @@
       </p:sp>
       <p:sp>
         <p:nvSpPr>
-          <p:cNvPr id="4" name="TextBox 3"/>
-          <p:cNvSpPr txBox="1"/>
+          <p:cNvPr id="2" name="Rounded Rectangle 1"/>
+          <p:cNvSpPr/>
           <p:nvPr/>
         </p:nvSpPr>
         <p:spPr>
           <a:xfrm>
-            <a:off x="492760" y="799490"/>
-            <a:ext cx="2448560" cy="978510"/>
+            <a:off x="238760" y="411480"/>
+            <a:ext cx="2778760" cy="2286458"/>
           </a:xfrm>
-          <a:prstGeom prst="rect">
-            <a:avLst/>
+          <a:prstGeom prst="roundRect">
+            <a:avLst>
+              <a:gd name="adj" fmla="val 3730"/>
+            </a:avLst>
           </a:prstGeom>
           <a:noFill/>
-        </p:spPr>
-        <p:txBody>
-          <a:bodyPr wrap="square">
-            <a:spAutoFit/>
-          </a:bodyPr>
-          <a:lstStyle/>
-          <a:p>
-            <a:pPr>
-              <a:spcBef>
-                <a:spcPts val="0"/>
-              </a:spcBef>
-              <a:spcAft>
-                <a:spcPts val="0"/>
-              </a:spcAft>
-              <a:defRPr sz="1200">
-                <a:solidFill>
-                  <a:srgbClr val="1F2D3D"/>
-                </a:solidFill>
-              </a:defRPr>
-            </a:pPr>
-            <a:r>
-              <a:t>Roll-call vote sessions</a:t>
-            </a:r>
-          </a:p>
-          <a:p>
-            <a:pPr>
-              <a:spcBef>
-                <a:spcPts val="0"/>
-              </a:spcBef>
-              <a:spcAft>
-                <a:spcPts val="0"/>
-              </a:spcAft>
-              <a:defRPr sz="1200">
-                <a:solidFill>
-                  <a:srgbClr val="1F2D3D"/>
-                </a:solidFill>
-              </a:defRPr>
-            </a:pPr>
-            <a:r>
-              <a:t>Proposition metadata</a:t>
-            </a:r>
-          </a:p>
-          <a:p>
-            <a:pPr>
-              <a:spcBef>
-                <a:spcPts val="0"/>
-              </a:spcBef>
-              <a:spcAft>
-                <a:spcPts val="0"/>
-              </a:spcAft>
-              <a:defRPr sz="1200">
-                <a:solidFill>
-                  <a:srgbClr val="1F2D3D"/>
-                </a:solidFill>
-              </a:defRPr>
-            </a:pPr>
-            <a:r>
-              <a:t>Authors / parties / legislature</a:t>
-            </a:r>
-          </a:p>
-          <a:p>
-            <a:pPr>
-              <a:spcBef>
-                <a:spcPts val="0"/>
-              </a:spcBef>
-              <a:spcAft>
-                <a:spcPts val="0"/>
-              </a:spcAft>
-              <a:defRPr sz="1200">
-                <a:solidFill>
-                  <a:srgbClr val="1F2D3D"/>
-                </a:solidFill>
-              </a:defRPr>
-            </a:pPr>
-            <a:r>
-              <a:t>Government orientation fields</a:t>
-            </a:r>
-          </a:p>
-        </p:txBody>
-      </p:sp>
-      <p:sp>
-        <p:nvSpPr>
-          <p:cNvPr id="5" name="Rounded Rectangle 4"/>
-          <p:cNvSpPr/>
-          <p:nvPr/>
-        </p:nvSpPr>
-        <p:spPr>
-          <a:xfrm>
-            <a:off x="3383280" y="411480"/>
-            <a:ext cx="2651760" cy="1417320"/>
-          </a:xfrm>
-          <a:prstGeom prst="roundRect">
-            <a:avLst/>
-          </a:prstGeom>
-          <a:solidFill>
-            <a:srgbClr val="F7F9FC"/>
-          </a:solidFill>
           <a:ln w="15875">
             <a:solidFill>
               <a:srgbClr val="2C3E50"/>
@@ -3321,6 +3183,154 @@
           <a:lstStyle/>
           <a:p>
             <a:pPr algn="ctr"/>
+            <a:endParaRPr dirty="0"/>
+          </a:p>
+        </p:txBody>
+      </p:sp>
+      <p:sp>
+        <p:nvSpPr>
+          <p:cNvPr id="4" name="TextBox 3"/>
+          <p:cNvSpPr txBox="1"/>
+          <p:nvPr/>
+        </p:nvSpPr>
+        <p:spPr>
+          <a:xfrm>
+            <a:off x="238760" y="799490"/>
+            <a:ext cx="2702560" cy="1815882"/>
+          </a:xfrm>
+          <a:prstGeom prst="rect">
+            <a:avLst/>
+          </a:prstGeom>
+          <a:noFill/>
+        </p:spPr>
+        <p:txBody>
+          <a:bodyPr wrap="square">
+            <a:spAutoFit/>
+          </a:bodyPr>
+          <a:lstStyle/>
+          <a:p>
+            <a:pPr>
+              <a:spcBef>
+                <a:spcPts val="0"/>
+              </a:spcBef>
+              <a:spcAft>
+                <a:spcPts val="0"/>
+              </a:spcAft>
+              <a:defRPr sz="1200">
+                <a:solidFill>
+                  <a:srgbClr val="1F2D3D"/>
+                </a:solidFill>
+              </a:defRPr>
+            </a:pPr>
+            <a:r>
+              <a:rPr sz="1600" dirty="0"/>
+              <a:t>Roll-call vote sessions</a:t>
+            </a:r>
+          </a:p>
+          <a:p>
+            <a:pPr>
+              <a:spcBef>
+                <a:spcPts val="0"/>
+              </a:spcBef>
+              <a:spcAft>
+                <a:spcPts val="0"/>
+              </a:spcAft>
+              <a:defRPr sz="1200">
+                <a:solidFill>
+                  <a:srgbClr val="1F2D3D"/>
+                </a:solidFill>
+              </a:defRPr>
+            </a:pPr>
+            <a:endParaRPr lang="pt-BR" sz="1600" dirty="0"/>
+          </a:p>
+          <a:p>
+            <a:pPr>
+              <a:spcBef>
+                <a:spcPts val="0"/>
+              </a:spcBef>
+              <a:spcAft>
+                <a:spcPts val="0"/>
+              </a:spcAft>
+              <a:defRPr sz="1200">
+                <a:solidFill>
+                  <a:srgbClr val="1F2D3D"/>
+                </a:solidFill>
+              </a:defRPr>
+            </a:pPr>
+            <a:r>
+              <a:rPr sz="1600" dirty="0"/>
+              <a:t>Proposition metadata</a:t>
+            </a:r>
+          </a:p>
+          <a:p>
+            <a:pPr>
+              <a:spcBef>
+                <a:spcPts val="0"/>
+              </a:spcBef>
+              <a:spcAft>
+                <a:spcPts val="0"/>
+              </a:spcAft>
+              <a:defRPr sz="1200">
+                <a:solidFill>
+                  <a:srgbClr val="1F2D3D"/>
+                </a:solidFill>
+              </a:defRPr>
+            </a:pPr>
+            <a:endParaRPr lang="pt-BR" sz="1600" dirty="0"/>
+          </a:p>
+          <a:p>
+            <a:pPr>
+              <a:spcBef>
+                <a:spcPts val="0"/>
+              </a:spcBef>
+              <a:spcAft>
+                <a:spcPts val="0"/>
+              </a:spcAft>
+              <a:defRPr sz="1200">
+                <a:solidFill>
+                  <a:srgbClr val="1F2D3D"/>
+                </a:solidFill>
+              </a:defRPr>
+            </a:pPr>
+            <a:r>
+              <a:rPr sz="1600" dirty="0"/>
+              <a:t>Authors / parties / legislature</a:t>
+            </a:r>
+          </a:p>
+          <a:p>
+            <a:pPr>
+              <a:spcBef>
+                <a:spcPts val="0"/>
+              </a:spcBef>
+              <a:spcAft>
+                <a:spcPts val="0"/>
+              </a:spcAft>
+              <a:defRPr sz="1200">
+                <a:solidFill>
+                  <a:srgbClr val="1F2D3D"/>
+                </a:solidFill>
+              </a:defRPr>
+            </a:pPr>
+            <a:endParaRPr lang="pt-BR" sz="1600" dirty="0"/>
+          </a:p>
+          <a:p>
+            <a:pPr>
+              <a:spcBef>
+                <a:spcPts val="0"/>
+              </a:spcBef>
+              <a:spcAft>
+                <a:spcPts val="0"/>
+              </a:spcAft>
+              <a:defRPr sz="1200">
+                <a:solidFill>
+                  <a:srgbClr val="1F2D3D"/>
+                </a:solidFill>
+              </a:defRPr>
+            </a:pPr>
+            <a:r>
+              <a:rPr sz="1600" dirty="0"/>
+              <a:t>Government orientation fields</a:t>
+            </a:r>
           </a:p>
         </p:txBody>
       </p:sp>
@@ -3332,8 +3342,8 @@
         </p:nvSpPr>
         <p:spPr>
           <a:xfrm>
-            <a:off x="3383280" y="411480"/>
-            <a:ext cx="2651760" cy="311810"/>
+            <a:off x="3256280" y="411480"/>
+            <a:ext cx="2778760" cy="311810"/>
           </a:xfrm>
           <a:prstGeom prst="roundRect">
             <a:avLst/>
@@ -3360,12 +3370,12 @@
           </a:fontRef>
         </p:style>
         <p:txBody>
-          <a:bodyPr rtlCol="0" anchor="ctr" lIns="127000" rIns="127000" tIns="76200" bIns="25400"/>
+          <a:bodyPr lIns="127000" tIns="76200" rIns="127000" bIns="25400" rtlCol="0" anchor="ctr"/>
           <a:lstStyle/>
           <a:p>
             <a:pPr algn="l"/>
             <a:r>
-              <a:rPr b="1" sz="1600">
+              <a:rPr b="1" dirty="0">
                 <a:solidFill>
                   <a:srgbClr val="FFFFFF"/>
                 </a:solidFill>
@@ -3384,7 +3394,7 @@
         <p:spPr>
           <a:xfrm>
             <a:off x="3510280" y="799490"/>
-            <a:ext cx="2448560" cy="978510"/>
+            <a:ext cx="2448560" cy="1815882"/>
           </a:xfrm>
           <a:prstGeom prst="rect">
             <a:avLst/>
@@ -3411,6 +3421,7 @@
               </a:defRPr>
             </a:pPr>
             <a:r>
+              <a:rPr sz="1600" dirty="0"/>
               <a:t>Download / load sources</a:t>
             </a:r>
           </a:p>
@@ -3428,9 +3439,7 @@
                 </a:solidFill>
               </a:defRPr>
             </a:pPr>
-            <a:r>
-              <a:t>Normalize identifiers</a:t>
-            </a:r>
+            <a:endParaRPr lang="pt-BR" sz="1600" dirty="0"/>
           </a:p>
           <a:p>
             <a:pPr>
@@ -3447,7 +3456,8 @@
               </a:defRPr>
             </a:pPr>
             <a:r>
-              <a:t>Parse dates and outcomes</a:t>
+              <a:rPr sz="1600" dirty="0"/>
+              <a:t>Normalize identifiers</a:t>
             </a:r>
           </a:p>
           <a:p>
@@ -3464,54 +3474,61 @@
                 </a:solidFill>
               </a:defRPr>
             </a:pPr>
-            <a:r>
+            <a:endParaRPr lang="pt-BR" sz="1600" dirty="0"/>
+          </a:p>
+          <a:p>
+            <a:pPr>
+              <a:spcBef>
+                <a:spcPts val="0"/>
+              </a:spcBef>
+              <a:spcAft>
+                <a:spcPts val="0"/>
+              </a:spcAft>
+              <a:defRPr sz="1200">
+                <a:solidFill>
+                  <a:srgbClr val="1F2D3D"/>
+                </a:solidFill>
+              </a:defRPr>
+            </a:pPr>
+            <a:r>
+              <a:rPr sz="1600" dirty="0"/>
+              <a:t>Parse dates and outcomes</a:t>
+            </a:r>
+          </a:p>
+          <a:p>
+            <a:pPr>
+              <a:spcBef>
+                <a:spcPts val="0"/>
+              </a:spcBef>
+              <a:spcAft>
+                <a:spcPts val="0"/>
+              </a:spcAft>
+              <a:defRPr sz="1200">
+                <a:solidFill>
+                  <a:srgbClr val="1F2D3D"/>
+                </a:solidFill>
+              </a:defRPr>
+            </a:pPr>
+            <a:endParaRPr lang="pt-BR" sz="1600" dirty="0"/>
+          </a:p>
+          <a:p>
+            <a:pPr>
+              <a:spcBef>
+                <a:spcPts val="0"/>
+              </a:spcBef>
+              <a:spcAft>
+                <a:spcPts val="0"/>
+              </a:spcAft>
+              <a:defRPr sz="1200">
+                <a:solidFill>
+                  <a:srgbClr val="1F2D3D"/>
+                </a:solidFill>
+              </a:defRPr>
+            </a:pPr>
+            <a:r>
+              <a:rPr sz="1600" dirty="0"/>
               <a:t>Remove duplicates</a:t>
             </a:r>
-          </a:p>
-        </p:txBody>
-      </p:sp>
-      <p:sp>
-        <p:nvSpPr>
-          <p:cNvPr id="8" name="Rounded Rectangle 7"/>
-          <p:cNvSpPr/>
-          <p:nvPr/>
-        </p:nvSpPr>
-        <p:spPr>
-          <a:xfrm>
-            <a:off x="6400800" y="411480"/>
-            <a:ext cx="2651760" cy="1417320"/>
-          </a:xfrm>
-          <a:prstGeom prst="roundRect">
-            <a:avLst/>
-          </a:prstGeom>
-          <a:solidFill>
-            <a:srgbClr val="F7F9FC"/>
-          </a:solidFill>
-          <a:ln w="15875">
-            <a:solidFill>
-              <a:srgbClr val="2C3E50"/>
-            </a:solidFill>
-          </a:ln>
-        </p:spPr>
-        <p:style>
-          <a:lnRef idx="1">
-            <a:schemeClr val="accent1"/>
-          </a:lnRef>
-          <a:fillRef idx="3">
-            <a:schemeClr val="accent1"/>
-          </a:fillRef>
-          <a:effectRef idx="2">
-            <a:schemeClr val="accent1"/>
-          </a:effectRef>
-          <a:fontRef idx="minor">
-            <a:schemeClr val="lt1"/>
-          </a:fontRef>
-        </p:style>
-        <p:txBody>
-          <a:bodyPr rtlCol="0" anchor="ctr"/>
-          <a:lstStyle/>
-          <a:p>
-            <a:pPr algn="ctr"/>
           </a:p>
         </p:txBody>
       </p:sp>
@@ -3523,8 +3540,8 @@
         </p:nvSpPr>
         <p:spPr>
           <a:xfrm>
-            <a:off x="6400800" y="411480"/>
-            <a:ext cx="2651760" cy="311810"/>
+            <a:off x="6279896" y="411480"/>
+            <a:ext cx="2854960" cy="311810"/>
           </a:xfrm>
           <a:prstGeom prst="roundRect">
             <a:avLst/>
@@ -3551,12 +3568,12 @@
           </a:fontRef>
         </p:style>
         <p:txBody>
-          <a:bodyPr rtlCol="0" anchor="ctr" lIns="127000" rIns="127000" tIns="76200" bIns="25400"/>
+          <a:bodyPr lIns="127000" tIns="76200" rIns="127000" bIns="25400" rtlCol="0" anchor="ctr"/>
           <a:lstStyle/>
           <a:p>
             <a:pPr algn="l"/>
             <a:r>
-              <a:rPr b="1" sz="1600">
+              <a:rPr b="1" dirty="0">
                 <a:solidFill>
                   <a:srgbClr val="FFFFFF"/>
                 </a:solidFill>
@@ -3574,8 +3591,8 @@
         </p:nvSpPr>
         <p:spPr>
           <a:xfrm>
-            <a:off x="6527800" y="799490"/>
-            <a:ext cx="2448560" cy="978510"/>
+            <a:off x="6273800" y="735990"/>
+            <a:ext cx="2943733" cy="2800767"/>
           </a:xfrm>
           <a:prstGeom prst="rect">
             <a:avLst/>
@@ -3602,6 +3619,7 @@
               </a:defRPr>
             </a:pPr>
             <a:r>
+              <a:rPr sz="1600" dirty="0"/>
               <a:t>Join sessions ↔ proposition info</a:t>
             </a:r>
           </a:p>
@@ -3619,9 +3637,7 @@
                 </a:solidFill>
               </a:defRPr>
             </a:pPr>
-            <a:r>
-              <a:t>Join engineered feature tables</a:t>
-            </a:r>
+            <a:endParaRPr lang="pt-BR" sz="1600" dirty="0"/>
           </a:p>
           <a:p>
             <a:pPr>
@@ -3638,7 +3654,8 @@
               </a:defRPr>
             </a:pPr>
             <a:r>
-              <a:t>Keep clear outcomes (0/1)</a:t>
+              <a:rPr sz="1600" dirty="0"/>
+              <a:t>Join engineered feature tables</a:t>
             </a:r>
           </a:p>
           <a:p>
@@ -3655,54 +3672,113 @@
                 </a:solidFill>
               </a:defRPr>
             </a:pPr>
-            <a:r>
+            <a:endParaRPr lang="pt-BR" sz="1600" dirty="0"/>
+          </a:p>
+          <a:p>
+            <a:pPr>
+              <a:spcBef>
+                <a:spcPts val="0"/>
+              </a:spcBef>
+              <a:spcAft>
+                <a:spcPts val="0"/>
+              </a:spcAft>
+              <a:defRPr sz="1200">
+                <a:solidFill>
+                  <a:srgbClr val="1F2D3D"/>
+                </a:solidFill>
+              </a:defRPr>
+            </a:pPr>
+            <a:r>
+              <a:rPr sz="1600" dirty="0"/>
+              <a:t>Keep clear outcomes (0/1)</a:t>
+            </a:r>
+          </a:p>
+          <a:p>
+            <a:pPr>
+              <a:spcBef>
+                <a:spcPts val="0"/>
+              </a:spcBef>
+              <a:spcAft>
+                <a:spcPts val="0"/>
+              </a:spcAft>
+              <a:defRPr sz="1200">
+                <a:solidFill>
+                  <a:srgbClr val="1F2D3D"/>
+                </a:solidFill>
+              </a:defRPr>
+            </a:pPr>
+            <a:endParaRPr lang="pt-BR" sz="1600" dirty="0"/>
+          </a:p>
+          <a:p>
+            <a:pPr>
+              <a:spcBef>
+                <a:spcPts val="0"/>
+              </a:spcBef>
+              <a:spcAft>
+                <a:spcPts val="0"/>
+              </a:spcAft>
+              <a:defRPr sz="1200">
+                <a:solidFill>
+                  <a:srgbClr val="1F2D3D"/>
+                </a:solidFill>
+              </a:defRPr>
+            </a:pPr>
+            <a:r>
+              <a:rPr sz="1600" dirty="0"/>
               <a:t>Sort chronologically by date</a:t>
             </a:r>
-          </a:p>
-        </p:txBody>
-      </p:sp>
-      <p:sp>
-        <p:nvSpPr>
-          <p:cNvPr id="11" name="Rounded Rectangle 10"/>
-          <p:cNvSpPr/>
-          <p:nvPr/>
-        </p:nvSpPr>
-        <p:spPr>
-          <a:xfrm>
-            <a:off x="9418320" y="411480"/>
-            <a:ext cx="2651760" cy="1417320"/>
-          </a:xfrm>
-          <a:prstGeom prst="roundRect">
-            <a:avLst/>
-          </a:prstGeom>
-          <a:solidFill>
-            <a:srgbClr val="F7F9FC"/>
-          </a:solidFill>
-          <a:ln w="15875">
-            <a:solidFill>
-              <a:srgbClr val="2C3E50"/>
-            </a:solidFill>
-          </a:ln>
-        </p:spPr>
-        <p:style>
-          <a:lnRef idx="1">
-            <a:schemeClr val="accent1"/>
-          </a:lnRef>
-          <a:fillRef idx="3">
-            <a:schemeClr val="accent1"/>
-          </a:fillRef>
-          <a:effectRef idx="2">
-            <a:schemeClr val="accent1"/>
-          </a:effectRef>
-          <a:fontRef idx="minor">
-            <a:schemeClr val="lt1"/>
-          </a:fontRef>
-        </p:style>
-        <p:txBody>
-          <a:bodyPr rtlCol="0" anchor="ctr"/>
-          <a:lstStyle/>
-          <a:p>
-            <a:pPr algn="ctr"/>
+            <a:endParaRPr lang="pt-BR" sz="1600" dirty="0"/>
+          </a:p>
+          <a:p>
+            <a:pPr>
+              <a:spcBef>
+                <a:spcPts val="0"/>
+              </a:spcBef>
+              <a:spcAft>
+                <a:spcPts val="0"/>
+              </a:spcAft>
+              <a:defRPr sz="1200">
+                <a:solidFill>
+                  <a:srgbClr val="1F2D3D"/>
+                </a:solidFill>
+              </a:defRPr>
+            </a:pPr>
+            <a:endParaRPr lang="pt-BR" sz="1600" dirty="0"/>
+          </a:p>
+          <a:p>
+            <a:pPr>
+              <a:spcBef>
+                <a:spcPts val="0"/>
+              </a:spcBef>
+              <a:spcAft>
+                <a:spcPts val="0"/>
+              </a:spcAft>
+              <a:defRPr sz="1200">
+                <a:solidFill>
+                  <a:srgbClr val="1F2D3D"/>
+                </a:solidFill>
+              </a:defRPr>
+            </a:pPr>
+            <a:r>
+              <a:rPr lang="pt-BR" sz="1600" dirty="0"/>
+              <a:t>Compute features after merge using only past sessions</a:t>
+            </a:r>
+          </a:p>
+          <a:p>
+            <a:pPr>
+              <a:spcBef>
+                <a:spcPts val="0"/>
+              </a:spcBef>
+              <a:spcAft>
+                <a:spcPts val="0"/>
+              </a:spcAft>
+              <a:defRPr sz="1200">
+                <a:solidFill>
+                  <a:srgbClr val="1F2D3D"/>
+                </a:solidFill>
+              </a:defRPr>
+            </a:pPr>
+            <a:endParaRPr sz="1600" dirty="0"/>
           </a:p>
         </p:txBody>
       </p:sp>
@@ -3714,8 +3790,8 @@
         </p:nvSpPr>
         <p:spPr>
           <a:xfrm>
-            <a:off x="9418320" y="411480"/>
-            <a:ext cx="2651760" cy="311810"/>
+            <a:off x="9372600" y="411480"/>
+            <a:ext cx="2697480" cy="311810"/>
           </a:xfrm>
           <a:prstGeom prst="roundRect">
             <a:avLst/>
@@ -3742,12 +3818,12 @@
           </a:fontRef>
         </p:style>
         <p:txBody>
-          <a:bodyPr rtlCol="0" anchor="ctr" lIns="127000" rIns="127000" tIns="76200" bIns="25400"/>
+          <a:bodyPr lIns="127000" tIns="76200" rIns="127000" bIns="25400" rtlCol="0" anchor="ctr"/>
           <a:lstStyle/>
           <a:p>
             <a:pPr algn="l"/>
             <a:r>
-              <a:rPr b="1" sz="1600">
+              <a:rPr b="1" dirty="0">
                 <a:solidFill>
                   <a:srgbClr val="FFFFFF"/>
                 </a:solidFill>
@@ -3765,8 +3841,8 @@
         </p:nvSpPr>
         <p:spPr>
           <a:xfrm>
-            <a:off x="9545320" y="799490"/>
-            <a:ext cx="2448560" cy="978510"/>
+            <a:off x="9342119" y="772058"/>
+            <a:ext cx="2936109" cy="2062103"/>
           </a:xfrm>
           <a:prstGeom prst="rect">
             <a:avLst/>
@@ -3793,6 +3869,7 @@
               </a:defRPr>
             </a:pPr>
             <a:r>
+              <a:rPr sz="1600" dirty="0"/>
               <a:t>Features use only past info</a:t>
             </a:r>
           </a:p>
@@ -3810,9 +3887,7 @@
                 </a:solidFill>
               </a:defRPr>
             </a:pPr>
-            <a:r>
-              <a:t>No look-ahead / no test leakage</a:t>
-            </a:r>
+            <a:endParaRPr lang="pt-BR" sz="1600" dirty="0"/>
           </a:p>
           <a:p>
             <a:pPr>
@@ -3829,53 +3904,81 @@
               </a:defRPr>
             </a:pPr>
             <a:r>
+              <a:rPr sz="1600" dirty="0"/>
+              <a:t>No look-ahead / no test leakage</a:t>
+            </a:r>
+          </a:p>
+          <a:p>
+            <a:pPr>
+              <a:spcBef>
+                <a:spcPts val="0"/>
+              </a:spcBef>
+              <a:spcAft>
+                <a:spcPts val="0"/>
+              </a:spcAft>
+              <a:defRPr sz="1200">
+                <a:solidFill>
+                  <a:srgbClr val="1F2D3D"/>
+                </a:solidFill>
+              </a:defRPr>
+            </a:pPr>
+            <a:endParaRPr lang="pt-BR" sz="1600" dirty="0"/>
+          </a:p>
+          <a:p>
+            <a:pPr>
+              <a:spcBef>
+                <a:spcPts val="0"/>
+              </a:spcBef>
+              <a:spcAft>
+                <a:spcPts val="0"/>
+              </a:spcAft>
+              <a:defRPr sz="1200">
+                <a:solidFill>
+                  <a:srgbClr val="1F2D3D"/>
+                </a:solidFill>
+              </a:defRPr>
+            </a:pPr>
+            <a:r>
+              <a:rPr sz="1600" dirty="0"/>
               <a:t>Chronological evaluation</a:t>
             </a:r>
-          </a:p>
-        </p:txBody>
-      </p:sp>
-      <p:sp>
-        <p:nvSpPr>
-          <p:cNvPr id="14" name="Rounded Rectangle 13"/>
-          <p:cNvSpPr/>
-          <p:nvPr/>
-        </p:nvSpPr>
-        <p:spPr>
-          <a:xfrm>
-            <a:off x="3383280" y="2240280"/>
-            <a:ext cx="2651760" cy="1874519"/>
-          </a:xfrm>
-          <a:prstGeom prst="roundRect">
-            <a:avLst/>
-          </a:prstGeom>
-          <a:solidFill>
-            <a:srgbClr val="F7F9FC"/>
-          </a:solidFill>
-          <a:ln w="15875">
-            <a:solidFill>
-              <a:srgbClr val="2C3E50"/>
-            </a:solidFill>
-          </a:ln>
-        </p:spPr>
-        <p:style>
-          <a:lnRef idx="1">
-            <a:schemeClr val="accent1"/>
-          </a:lnRef>
-          <a:fillRef idx="3">
-            <a:schemeClr val="accent1"/>
-          </a:fillRef>
-          <a:effectRef idx="2">
-            <a:schemeClr val="accent1"/>
-          </a:effectRef>
-          <a:fontRef idx="minor">
-            <a:schemeClr val="lt1"/>
-          </a:fontRef>
-        </p:style>
-        <p:txBody>
-          <a:bodyPr rtlCol="0" anchor="ctr"/>
-          <a:lstStyle/>
-          <a:p>
-            <a:pPr algn="ctr"/>
+            <a:endParaRPr lang="pt-BR" sz="1600" dirty="0"/>
+          </a:p>
+          <a:p>
+            <a:pPr>
+              <a:spcBef>
+                <a:spcPts val="0"/>
+              </a:spcBef>
+              <a:spcAft>
+                <a:spcPts val="0"/>
+              </a:spcAft>
+              <a:defRPr sz="1200">
+                <a:solidFill>
+                  <a:srgbClr val="1F2D3D"/>
+                </a:solidFill>
+              </a:defRPr>
+            </a:pPr>
+            <a:endParaRPr lang="pt-BR" sz="1600" dirty="0"/>
+          </a:p>
+          <a:p>
+            <a:pPr>
+              <a:spcBef>
+                <a:spcPts val="0"/>
+              </a:spcBef>
+              <a:spcAft>
+                <a:spcPts val="0"/>
+              </a:spcAft>
+              <a:defRPr sz="1200">
+                <a:solidFill>
+                  <a:srgbClr val="1F2D3D"/>
+                </a:solidFill>
+              </a:defRPr>
+            </a:pPr>
+            <a:r>
+              <a:rPr lang="pt-BR" sz="1600" dirty="0"/>
+              <a:t>Apply temporal split and evaluation</a:t>
+            </a:r>
+            <a:endParaRPr sz="1600" dirty="0"/>
           </a:p>
         </p:txBody>
       </p:sp>
@@ -3887,8 +3990,8 @@
         </p:nvSpPr>
         <p:spPr>
           <a:xfrm>
-            <a:off x="3383280" y="2240280"/>
-            <a:ext cx="2651760" cy="412394"/>
+            <a:off x="3914777" y="4023360"/>
+            <a:ext cx="3844670" cy="412394"/>
           </a:xfrm>
           <a:prstGeom prst="roundRect">
             <a:avLst/>
@@ -3915,17 +4018,17 @@
           </a:fontRef>
         </p:style>
         <p:txBody>
-          <a:bodyPr rtlCol="0" anchor="ctr" lIns="127000" rIns="127000" tIns="76200" bIns="25400"/>
+          <a:bodyPr lIns="127000" tIns="76200" rIns="127000" bIns="25400" rtlCol="0" anchor="ctr"/>
           <a:lstStyle/>
           <a:p>
             <a:pPr algn="l"/>
             <a:r>
-              <a:rPr b="1" sz="1600">
+              <a:rPr b="1" dirty="0">
                 <a:solidFill>
                   <a:srgbClr val="FFFFFF"/>
                 </a:solidFill>
               </a:rPr>
-              <a:t>Feature Engineering (per session i)</a:t>
+              <a:t>Feature Engineering</a:t>
             </a:r>
           </a:p>
         </p:txBody>
@@ -3938,8 +4041,8 @@
         </p:nvSpPr>
         <p:spPr>
           <a:xfrm>
-            <a:off x="3510280" y="2728874"/>
-            <a:ext cx="2448560" cy="1335125"/>
+            <a:off x="3985134" y="4493666"/>
+            <a:ext cx="3780536" cy="2062103"/>
           </a:xfrm>
           <a:prstGeom prst="rect">
             <a:avLst/>
@@ -3966,6 +4069,7 @@
               </a:defRPr>
             </a:pPr>
             <a:r>
+              <a:rPr sz="1600" dirty="0"/>
               <a:t>Gov. orientation: resolve GOV. vs Governo</a:t>
             </a:r>
           </a:p>
@@ -3984,7 +4088,16 @@
               </a:defRPr>
             </a:pPr>
             <a:r>
-              <a:t>Coalition size: num_authors_trunc, &gt;10 flag</a:t>
+              <a:rPr sz="1600" dirty="0"/>
+              <a:t>Coalition size: </a:t>
+            </a:r>
+            <a:r>
+              <a:rPr sz="1600" dirty="0" err="1"/>
+              <a:t>num_authors_trunc</a:t>
+            </a:r>
+            <a:r>
+              <a:rPr sz="1600" dirty="0"/>
+              <a:t>, &gt;10 flag</a:t>
             </a:r>
           </a:p>
           <a:p>
@@ -4001,7 +4114,11 @@
                 </a:solidFill>
               </a:defRPr>
             </a:pPr>
-            <a:r>
+            <a:br>
+              <a:rPr lang="pt-BR" sz="1600" dirty="0"/>
+            </a:br>
+            <a:r>
+              <a:rPr sz="1600" dirty="0"/>
               <a:t>Author popularity: past success (merged)</a:t>
             </a:r>
           </a:p>
@@ -4020,6 +4137,7 @@
               </a:defRPr>
             </a:pPr>
             <a:r>
+              <a:rPr sz="1600" dirty="0"/>
               <a:t>Party popularity: last K sessions (K=5)</a:t>
             </a:r>
           </a:p>
@@ -4037,7 +4155,11 @@
                 </a:solidFill>
               </a:defRPr>
             </a:pPr>
-            <a:r>
+            <a:br>
+              <a:rPr lang="pt-BR" sz="1600" dirty="0"/>
+            </a:br>
+            <a:r>
+              <a:rPr sz="1600" dirty="0"/>
               <a:t>HAR: past outcomes for same proposition</a:t>
             </a:r>
           </a:p>
@@ -4056,53 +4178,17 @@
               </a:defRPr>
             </a:pPr>
             <a:r>
-              <a:t>Missing: popularity/party_pop=0, HAR=0.5</a:t>
-            </a:r>
-          </a:p>
-        </p:txBody>
-      </p:sp>
-      <p:sp>
-        <p:nvSpPr>
-          <p:cNvPr id="17" name="Rounded Rectangle 16"/>
-          <p:cNvSpPr/>
-          <p:nvPr/>
-        </p:nvSpPr>
-        <p:spPr>
-          <a:xfrm>
-            <a:off x="9418320" y="2240280"/>
-            <a:ext cx="2651760" cy="1874519"/>
-          </a:xfrm>
-          <a:prstGeom prst="roundRect">
-            <a:avLst/>
-          </a:prstGeom>
-          <a:solidFill>
-            <a:srgbClr val="F7F9FC"/>
-          </a:solidFill>
-          <a:ln w="15875">
-            <a:solidFill>
-              <a:srgbClr val="2C3E50"/>
-            </a:solidFill>
-          </a:ln>
-        </p:spPr>
-        <p:style>
-          <a:lnRef idx="1">
-            <a:schemeClr val="accent1"/>
-          </a:lnRef>
-          <a:fillRef idx="3">
-            <a:schemeClr val="accent1"/>
-          </a:fillRef>
-          <a:effectRef idx="2">
-            <a:schemeClr val="accent1"/>
-          </a:effectRef>
-          <a:fontRef idx="minor">
-            <a:schemeClr val="lt1"/>
-          </a:fontRef>
-        </p:style>
-        <p:txBody>
-          <a:bodyPr rtlCol="0" anchor="ctr"/>
-          <a:lstStyle/>
-          <a:p>
-            <a:pPr algn="ctr"/>
+              <a:rPr sz="1600" dirty="0"/>
+              <a:t>Missing: popularity/</a:t>
+            </a:r>
+            <a:r>
+              <a:rPr sz="1600" dirty="0" err="1"/>
+              <a:t>party_pop</a:t>
+            </a:r>
+            <a:r>
+              <a:rPr sz="1600" dirty="0"/>
+              <a:t>=0, HAR=0.5</a:t>
+            </a:r>
           </a:p>
         </p:txBody>
       </p:sp>
@@ -4114,8 +4200,8 @@
         </p:nvSpPr>
         <p:spPr>
           <a:xfrm>
-            <a:off x="9418320" y="2240280"/>
-            <a:ext cx="2651760" cy="412394"/>
+            <a:off x="8391525" y="4023360"/>
+            <a:ext cx="3678555" cy="412394"/>
           </a:xfrm>
           <a:prstGeom prst="roundRect">
             <a:avLst/>
@@ -4142,12 +4228,12 @@
           </a:fontRef>
         </p:style>
         <p:txBody>
-          <a:bodyPr rtlCol="0" anchor="ctr" lIns="127000" rIns="127000" tIns="76200" bIns="25400"/>
+          <a:bodyPr lIns="127000" tIns="76200" rIns="127000" bIns="25400" rtlCol="0" anchor="ctr"/>
           <a:lstStyle/>
           <a:p>
             <a:pPr algn="l"/>
             <a:r>
-              <a:rPr b="1" sz="1600">
+              <a:rPr b="1" dirty="0">
                 <a:solidFill>
                   <a:srgbClr val="FFFFFF"/>
                 </a:solidFill>
@@ -4165,8 +4251,8 @@
         </p:nvSpPr>
         <p:spPr>
           <a:xfrm>
-            <a:off x="9545320" y="2728874"/>
-            <a:ext cx="2448560" cy="1335125"/>
+            <a:off x="8362062" y="4493666"/>
+            <a:ext cx="3780536" cy="1900777"/>
           </a:xfrm>
           <a:prstGeom prst="rect">
             <a:avLst/>
@@ -4180,6 +4266,9 @@
           <a:lstStyle/>
           <a:p>
             <a:pPr>
+              <a:lnSpc>
+                <a:spcPct val="150000"/>
+              </a:lnSpc>
               <a:spcBef>
                 <a:spcPts val="0"/>
               </a:spcBef>
@@ -4193,11 +4282,15 @@
               </a:defRPr>
             </a:pPr>
             <a:r>
+              <a:rPr sz="1600" dirty="0"/>
               <a:t>Train: first 80% (time-ordered)</a:t>
             </a:r>
           </a:p>
           <a:p>
             <a:pPr>
+              <a:lnSpc>
+                <a:spcPct val="150000"/>
+              </a:lnSpc>
               <a:spcBef>
                 <a:spcPts val="0"/>
               </a:spcBef>
@@ -4211,11 +4304,15 @@
               </a:defRPr>
             </a:pPr>
             <a:r>
+              <a:rPr sz="1600" dirty="0"/>
               <a:t>Test: last 20% (future)</a:t>
             </a:r>
           </a:p>
           <a:p>
             <a:pPr>
+              <a:lnSpc>
+                <a:spcPct val="150000"/>
+              </a:lnSpc>
               <a:spcBef>
                 <a:spcPts val="0"/>
               </a:spcBef>
@@ -4229,11 +4326,20 @@
               </a:defRPr>
             </a:pPr>
             <a:r>
-              <a:t>Models: VOTE-RAP, baselines, VIOLA-style</a:t>
-            </a:r>
+              <a:rPr sz="1600" dirty="0"/>
+              <a:t>Models: VOTE-RAP, baselines, </a:t>
+            </a:r>
+            <a:r>
+              <a:rPr lang="pt-BR" sz="1600" dirty="0"/>
+              <a:t>Albuquerque</a:t>
+            </a:r>
+            <a:endParaRPr sz="1600" dirty="0"/>
           </a:p>
           <a:p>
             <a:pPr>
+              <a:lnSpc>
+                <a:spcPct val="150000"/>
+              </a:lnSpc>
               <a:spcBef>
                 <a:spcPts val="0"/>
               </a:spcBef>
@@ -4247,11 +4353,15 @@
               </a:defRPr>
             </a:pPr>
             <a:r>
+              <a:rPr sz="1600" dirty="0"/>
               <a:t>Metrics: AUROC + F1 (Rejected)</a:t>
             </a:r>
           </a:p>
           <a:p>
             <a:pPr>
+              <a:lnSpc>
+                <a:spcPct val="150000"/>
+              </a:lnSpc>
               <a:spcBef>
                 <a:spcPts val="0"/>
               </a:spcBef>
@@ -4265,53 +4375,9 @@
               </a:defRPr>
             </a:pPr>
             <a:r>
+              <a:rPr sz="1600" dirty="0"/>
               <a:t>Rejected threshold: maximize F1 for class 0</a:t>
             </a:r>
-          </a:p>
-        </p:txBody>
-      </p:sp>
-      <p:sp>
-        <p:nvSpPr>
-          <p:cNvPr id="20" name="Rounded Rectangle 19"/>
-          <p:cNvSpPr/>
-          <p:nvPr/>
-        </p:nvSpPr>
-        <p:spPr>
-          <a:xfrm>
-            <a:off x="365760" y="4754880"/>
-            <a:ext cx="2651760" cy="1417320"/>
-          </a:xfrm>
-          <a:prstGeom prst="roundRect">
-            <a:avLst/>
-          </a:prstGeom>
-          <a:solidFill>
-            <a:srgbClr val="F7F9FC"/>
-          </a:solidFill>
-          <a:ln w="15875">
-            <a:solidFill>
-              <a:srgbClr val="2C3E50"/>
-            </a:solidFill>
-          </a:ln>
-        </p:spPr>
-        <p:style>
-          <a:lnRef idx="1">
-            <a:schemeClr val="accent1"/>
-          </a:lnRef>
-          <a:fillRef idx="3">
-            <a:schemeClr val="accent1"/>
-          </a:fillRef>
-          <a:effectRef idx="2">
-            <a:schemeClr val="accent1"/>
-          </a:effectRef>
-          <a:fontRef idx="minor">
-            <a:schemeClr val="lt1"/>
-          </a:fontRef>
-        </p:style>
-        <p:txBody>
-          <a:bodyPr rtlCol="0" anchor="ctr"/>
-          <a:lstStyle/>
-          <a:p>
-            <a:pPr algn="ctr"/>
           </a:p>
         </p:txBody>
       </p:sp>
@@ -4323,7 +4389,7 @@
         </p:nvSpPr>
         <p:spPr>
           <a:xfrm>
-            <a:off x="365760" y="4754880"/>
+            <a:off x="735330" y="4324654"/>
             <a:ext cx="2651760" cy="311810"/>
           </a:xfrm>
           <a:prstGeom prst="roundRect">
@@ -4351,12 +4417,12 @@
           </a:fontRef>
         </p:style>
         <p:txBody>
-          <a:bodyPr rtlCol="0" anchor="ctr" lIns="127000" rIns="127000" tIns="76200" bIns="25400"/>
+          <a:bodyPr lIns="127000" tIns="76200" rIns="127000" bIns="25400" rtlCol="0" anchor="ctr"/>
           <a:lstStyle/>
           <a:p>
             <a:pPr algn="l"/>
             <a:r>
-              <a:rPr b="1" sz="1600">
+              <a:rPr b="1" dirty="0">
                 <a:solidFill>
                   <a:srgbClr val="FFFFFF"/>
                 </a:solidFill>
@@ -4374,8 +4440,8 @@
         </p:nvSpPr>
         <p:spPr>
           <a:xfrm>
-            <a:off x="492760" y="5142890"/>
-            <a:ext cx="2448560" cy="978510"/>
+            <a:off x="862330" y="4712664"/>
+            <a:ext cx="2448560" cy="1900777"/>
           </a:xfrm>
           <a:prstGeom prst="rect">
             <a:avLst/>
@@ -4389,6 +4455,9 @@
           <a:lstStyle/>
           <a:p>
             <a:pPr>
+              <a:lnSpc>
+                <a:spcPct val="150000"/>
+              </a:lnSpc>
               <a:spcBef>
                 <a:spcPts val="0"/>
               </a:spcBef>
@@ -4402,11 +4471,15 @@
               </a:defRPr>
             </a:pPr>
             <a:r>
+              <a:rPr sz="1600" dirty="0"/>
               <a:t>vote_sessions_full.csv</a:t>
             </a:r>
           </a:p>
           <a:p>
             <a:pPr>
+              <a:lnSpc>
+                <a:spcPct val="150000"/>
+              </a:lnSpc>
               <a:spcBef>
                 <a:spcPts val="0"/>
               </a:spcBef>
@@ -4420,11 +4493,15 @@
               </a:defRPr>
             </a:pPr>
             <a:r>
+              <a:rPr sz="1600" dirty="0"/>
               <a:t>author_popularity.csv</a:t>
             </a:r>
           </a:p>
           <a:p>
             <a:pPr>
+              <a:lnSpc>
+                <a:spcPct val="150000"/>
+              </a:lnSpc>
               <a:spcBef>
                 <a:spcPts val="0"/>
               </a:spcBef>
@@ -4438,11 +4515,15 @@
               </a:defRPr>
             </a:pPr>
             <a:r>
+              <a:rPr sz="1600" dirty="0"/>
               <a:t>party_popularity_*.csv</a:t>
             </a:r>
           </a:p>
           <a:p>
             <a:pPr>
+              <a:lnSpc>
+                <a:spcPct val="150000"/>
+              </a:lnSpc>
               <a:spcBef>
                 <a:spcPts val="0"/>
               </a:spcBef>
@@ -4456,11 +4537,15 @@
               </a:defRPr>
             </a:pPr>
             <a:r>
+              <a:rPr sz="1600" dirty="0"/>
               <a:t>proposition_history_*.csv</a:t>
             </a:r>
           </a:p>
           <a:p>
             <a:pPr>
+              <a:lnSpc>
+                <a:spcPct val="150000"/>
+              </a:lnSpc>
               <a:spcBef>
                 <a:spcPts val="0"/>
               </a:spcBef>
@@ -4474,40 +4559,323 @@
               </a:defRPr>
             </a:pPr>
             <a:r>
+              <a:rPr sz="1600" dirty="0"/>
               <a:t>comparison_*.png / .csv</a:t>
             </a:r>
+          </a:p>
+        </p:txBody>
+      </p:sp>
+      <p:sp>
+        <p:nvSpPr>
+          <p:cNvPr id="20" name="Rounded Rectangle 19"/>
+          <p:cNvSpPr/>
+          <p:nvPr/>
+        </p:nvSpPr>
+        <p:spPr>
+          <a:xfrm>
+            <a:off x="735330" y="4324653"/>
+            <a:ext cx="2651760" cy="2288788"/>
+          </a:xfrm>
+          <a:prstGeom prst="roundRect">
+            <a:avLst>
+              <a:gd name="adj" fmla="val 4409"/>
+            </a:avLst>
+          </a:prstGeom>
+          <a:noFill/>
+          <a:ln w="15875">
+            <a:solidFill>
+              <a:srgbClr val="2C3E50"/>
+            </a:solidFill>
+          </a:ln>
+        </p:spPr>
+        <p:style>
+          <a:lnRef idx="1">
+            <a:schemeClr val="accent1"/>
+          </a:lnRef>
+          <a:fillRef idx="3">
+            <a:schemeClr val="accent1"/>
+          </a:fillRef>
+          <a:effectRef idx="2">
+            <a:schemeClr val="accent1"/>
+          </a:effectRef>
+          <a:fontRef idx="minor">
+            <a:schemeClr val="lt1"/>
+          </a:fontRef>
+        </p:style>
+        <p:txBody>
+          <a:bodyPr rtlCol="0" anchor="ctr"/>
+          <a:lstStyle/>
+          <a:p>
+            <a:pPr algn="ctr"/>
+            <a:endParaRPr/>
+          </a:p>
+        </p:txBody>
+      </p:sp>
+      <p:sp>
+        <p:nvSpPr>
+          <p:cNvPr id="5" name="Rounded Rectangle 4"/>
+          <p:cNvSpPr/>
+          <p:nvPr/>
+        </p:nvSpPr>
+        <p:spPr>
+          <a:xfrm>
+            <a:off x="3256280" y="411479"/>
+            <a:ext cx="2778760" cy="2286459"/>
+          </a:xfrm>
+          <a:prstGeom prst="roundRect">
+            <a:avLst>
+              <a:gd name="adj" fmla="val 4301"/>
+            </a:avLst>
+          </a:prstGeom>
+          <a:noFill/>
+          <a:ln w="15875">
+            <a:solidFill>
+              <a:srgbClr val="2C3E50"/>
+            </a:solidFill>
+          </a:ln>
+        </p:spPr>
+        <p:style>
+          <a:lnRef idx="1">
+            <a:schemeClr val="accent1"/>
+          </a:lnRef>
+          <a:fillRef idx="3">
+            <a:schemeClr val="accent1"/>
+          </a:fillRef>
+          <a:effectRef idx="2">
+            <a:schemeClr val="accent1"/>
+          </a:effectRef>
+          <a:fontRef idx="minor">
+            <a:schemeClr val="lt1"/>
+          </a:fontRef>
+        </p:style>
+        <p:txBody>
+          <a:bodyPr rtlCol="0" anchor="ctr"/>
+          <a:lstStyle/>
+          <a:p>
+            <a:pPr algn="ctr"/>
+            <a:endParaRPr/>
+          </a:p>
+        </p:txBody>
+      </p:sp>
+      <p:sp>
+        <p:nvSpPr>
+          <p:cNvPr id="8" name="Rounded Rectangle 7"/>
+          <p:cNvSpPr/>
+          <p:nvPr/>
+        </p:nvSpPr>
+        <p:spPr>
+          <a:xfrm>
+            <a:off x="6279896" y="411480"/>
+            <a:ext cx="2854960" cy="2944368"/>
+          </a:xfrm>
+          <a:prstGeom prst="roundRect">
+            <a:avLst>
+              <a:gd name="adj" fmla="val 3764"/>
+            </a:avLst>
+          </a:prstGeom>
+          <a:noFill/>
+          <a:ln w="15875">
+            <a:solidFill>
+              <a:srgbClr val="2C3E50"/>
+            </a:solidFill>
+          </a:ln>
+        </p:spPr>
+        <p:style>
+          <a:lnRef idx="1">
+            <a:schemeClr val="accent1"/>
+          </a:lnRef>
+          <a:fillRef idx="3">
+            <a:schemeClr val="accent1"/>
+          </a:fillRef>
+          <a:effectRef idx="2">
+            <a:schemeClr val="accent1"/>
+          </a:effectRef>
+          <a:fontRef idx="minor">
+            <a:schemeClr val="lt1"/>
+          </a:fontRef>
+        </p:style>
+        <p:txBody>
+          <a:bodyPr rtlCol="0" anchor="ctr"/>
+          <a:lstStyle/>
+          <a:p>
+            <a:pPr algn="ctr"/>
+            <a:endParaRPr/>
+          </a:p>
+        </p:txBody>
+      </p:sp>
+      <p:sp>
+        <p:nvSpPr>
+          <p:cNvPr id="11" name="Rounded Rectangle 10"/>
+          <p:cNvSpPr/>
+          <p:nvPr/>
+        </p:nvSpPr>
+        <p:spPr>
+          <a:xfrm>
+            <a:off x="9372600" y="411479"/>
+            <a:ext cx="2697480" cy="2422682"/>
+          </a:xfrm>
+          <a:prstGeom prst="roundRect">
+            <a:avLst>
+              <a:gd name="adj" fmla="val 3226"/>
+            </a:avLst>
+          </a:prstGeom>
+          <a:noFill/>
+          <a:ln w="15875">
+            <a:solidFill>
+              <a:srgbClr val="2C3E50"/>
+            </a:solidFill>
+          </a:ln>
+        </p:spPr>
+        <p:style>
+          <a:lnRef idx="1">
+            <a:schemeClr val="accent1"/>
+          </a:lnRef>
+          <a:fillRef idx="3">
+            <a:schemeClr val="accent1"/>
+          </a:fillRef>
+          <a:effectRef idx="2">
+            <a:schemeClr val="accent1"/>
+          </a:effectRef>
+          <a:fontRef idx="minor">
+            <a:schemeClr val="lt1"/>
+          </a:fontRef>
+        </p:style>
+        <p:txBody>
+          <a:bodyPr rtlCol="0" anchor="ctr"/>
+          <a:lstStyle/>
+          <a:p>
+            <a:pPr algn="ctr"/>
+            <a:endParaRPr/>
+          </a:p>
+        </p:txBody>
+      </p:sp>
+      <p:sp>
+        <p:nvSpPr>
+          <p:cNvPr id="17" name="Rounded Rectangle 16"/>
+          <p:cNvSpPr/>
+          <p:nvPr/>
+        </p:nvSpPr>
+        <p:spPr>
+          <a:xfrm>
+            <a:off x="8391525" y="4023359"/>
+            <a:ext cx="3678555" cy="2532407"/>
+          </a:xfrm>
+          <a:prstGeom prst="roundRect">
+            <a:avLst>
+              <a:gd name="adj" fmla="val 2521"/>
+            </a:avLst>
+          </a:prstGeom>
+          <a:noFill/>
+          <a:ln w="15875">
+            <a:solidFill>
+              <a:srgbClr val="2C3E50"/>
+            </a:solidFill>
+          </a:ln>
+        </p:spPr>
+        <p:style>
+          <a:lnRef idx="1">
+            <a:schemeClr val="accent1"/>
+          </a:lnRef>
+          <a:fillRef idx="3">
+            <a:schemeClr val="accent1"/>
+          </a:fillRef>
+          <a:effectRef idx="2">
+            <a:schemeClr val="accent1"/>
+          </a:effectRef>
+          <a:fontRef idx="minor">
+            <a:schemeClr val="lt1"/>
+          </a:fontRef>
+        </p:style>
+        <p:txBody>
+          <a:bodyPr rtlCol="0" anchor="ctr"/>
+          <a:lstStyle/>
+          <a:p>
+            <a:pPr algn="ctr"/>
+            <a:endParaRPr/>
+          </a:p>
+        </p:txBody>
+      </p:sp>
+      <p:sp>
+        <p:nvSpPr>
+          <p:cNvPr id="14" name="Rounded Rectangle 13"/>
+          <p:cNvSpPr/>
+          <p:nvPr/>
+        </p:nvSpPr>
+        <p:spPr>
+          <a:xfrm>
+            <a:off x="3914777" y="4023361"/>
+            <a:ext cx="3844670" cy="2532408"/>
+          </a:xfrm>
+          <a:prstGeom prst="roundRect">
+            <a:avLst>
+              <a:gd name="adj" fmla="val 4472"/>
+            </a:avLst>
+          </a:prstGeom>
+          <a:noFill/>
+          <a:ln w="15875">
+            <a:solidFill>
+              <a:srgbClr val="2C3E50"/>
+            </a:solidFill>
+          </a:ln>
+        </p:spPr>
+        <p:style>
+          <a:lnRef idx="1">
+            <a:schemeClr val="accent1"/>
+          </a:lnRef>
+          <a:fillRef idx="3">
+            <a:schemeClr val="accent1"/>
+          </a:fillRef>
+          <a:effectRef idx="2">
+            <a:schemeClr val="accent1"/>
+          </a:effectRef>
+          <a:fontRef idx="minor">
+            <a:schemeClr val="lt1"/>
+          </a:fontRef>
+        </p:style>
+        <p:txBody>
+          <a:bodyPr rtlCol="0" anchor="ctr"/>
+          <a:lstStyle/>
+          <a:p>
+            <a:pPr algn="ctr"/>
+            <a:endParaRPr/>
           </a:p>
         </p:txBody>
       </p:sp>
       <p:cxnSp>
         <p:nvCxnSpPr>
-          <p:cNvPr id="23" name="Connector 22"/>
-          <p:cNvCxnSpPr/>
+          <p:cNvPr id="35" name="Straight Arrow Connector 34">
+            <a:extLst>
+              <a:ext uri="{FF2B5EF4-FFF2-40B4-BE49-F238E27FC236}">
+                <a16:creationId xmlns:a16="http://schemas.microsoft.com/office/drawing/2014/main" id="{52A2BCFD-A1DD-B0B8-0FF7-72AC8359A4DF}"/>
+              </a:ext>
+            </a:extLst>
+          </p:cNvPr>
+          <p:cNvCxnSpPr>
+            <a:cxnSpLocks/>
+          </p:cNvCxnSpPr>
           <p:nvPr/>
         </p:nvCxnSpPr>
         <p:spPr>
           <a:xfrm>
-            <a:off x="3017520" y="1120140.0"/>
-            <a:ext cx="365760" cy="0.0"/>
+            <a:off x="2867025" y="1263650"/>
+            <a:ext cx="385761" cy="0"/>
           </a:xfrm>
-          <a:prstGeom prst="line">
+          <a:prstGeom prst="straightConnector1">
             <a:avLst/>
           </a:prstGeom>
-          <a:ln w="19050">
-            <a:solidFill>
-              <a:srgbClr val="34495E"/>
-            </a:solidFill>
+          <a:ln>
+            <a:tailEnd type="triangle"/>
           </a:ln>
         </p:spPr>
         <p:style>
           <a:lnRef idx="2">
-            <a:schemeClr val="accent1"/>
+            <a:schemeClr val="dk1"/>
           </a:lnRef>
           <a:fillRef idx="0">
-            <a:schemeClr val="accent1"/>
+            <a:schemeClr val="dk1"/>
           </a:fillRef>
           <a:effectRef idx="1">
-            <a:schemeClr val="accent1"/>
+            <a:schemeClr val="dk1"/>
           </a:effectRef>
           <a:fontRef idx="minor">
             <a:schemeClr val="tx1"/>
@@ -4516,33 +4884,39 @@
       </p:cxnSp>
       <p:cxnSp>
         <p:nvCxnSpPr>
-          <p:cNvPr id="24" name="Connector 23"/>
-          <p:cNvCxnSpPr/>
+          <p:cNvPr id="38" name="Straight Arrow Connector 37">
+            <a:extLst>
+              <a:ext uri="{FF2B5EF4-FFF2-40B4-BE49-F238E27FC236}">
+                <a16:creationId xmlns:a16="http://schemas.microsoft.com/office/drawing/2014/main" id="{30736B07-38BE-664A-A80A-58191EA95843}"/>
+              </a:ext>
+            </a:extLst>
+          </p:cNvPr>
+          <p:cNvCxnSpPr>
+            <a:cxnSpLocks/>
+          </p:cNvCxnSpPr>
           <p:nvPr/>
         </p:nvCxnSpPr>
         <p:spPr>
           <a:xfrm>
-            <a:off x="6035040" y="1120140.0"/>
-            <a:ext cx="365760" cy="0.0"/>
+            <a:off x="10746105" y="2953512"/>
+            <a:ext cx="0" cy="989457"/>
           </a:xfrm>
-          <a:prstGeom prst="line">
+          <a:prstGeom prst="straightConnector1">
             <a:avLst/>
           </a:prstGeom>
-          <a:ln w="19050">
-            <a:solidFill>
-              <a:srgbClr val="34495E"/>
-            </a:solidFill>
+          <a:ln>
+            <a:tailEnd type="triangle"/>
           </a:ln>
         </p:spPr>
         <p:style>
           <a:lnRef idx="2">
-            <a:schemeClr val="accent1"/>
+            <a:schemeClr val="dk1"/>
           </a:lnRef>
           <a:fillRef idx="0">
-            <a:schemeClr val="accent1"/>
+            <a:schemeClr val="dk1"/>
           </a:fillRef>
           <a:effectRef idx="1">
-            <a:schemeClr val="accent1"/>
+            <a:schemeClr val="dk1"/>
           </a:effectRef>
           <a:fontRef idx="minor">
             <a:schemeClr val="tx1"/>
@@ -4551,33 +4925,39 @@
       </p:cxnSp>
       <p:cxnSp>
         <p:nvCxnSpPr>
-          <p:cNvPr id="25" name="Connector 24"/>
-          <p:cNvCxnSpPr/>
+          <p:cNvPr id="41" name="Straight Arrow Connector 40">
+            <a:extLst>
+              <a:ext uri="{FF2B5EF4-FFF2-40B4-BE49-F238E27FC236}">
+                <a16:creationId xmlns:a16="http://schemas.microsoft.com/office/drawing/2014/main" id="{DFA08D17-2916-EC9E-94DA-EB300655FE27}"/>
+              </a:ext>
+            </a:extLst>
+          </p:cNvPr>
+          <p:cNvCxnSpPr>
+            <a:cxnSpLocks/>
+          </p:cNvCxnSpPr>
           <p:nvPr/>
         </p:nvCxnSpPr>
         <p:spPr>
           <a:xfrm>
-            <a:off x="9052560" y="1120140.0"/>
-            <a:ext cx="365760" cy="0.0"/>
+            <a:off x="7216775" y="3440049"/>
+            <a:ext cx="1905" cy="502920"/>
           </a:xfrm>
-          <a:prstGeom prst="line">
+          <a:prstGeom prst="straightConnector1">
             <a:avLst/>
           </a:prstGeom>
-          <a:ln w="19050">
-            <a:solidFill>
-              <a:srgbClr val="34495E"/>
-            </a:solidFill>
+          <a:ln>
+            <a:tailEnd type="triangle"/>
           </a:ln>
         </p:spPr>
         <p:style>
           <a:lnRef idx="2">
-            <a:schemeClr val="accent1"/>
+            <a:schemeClr val="dk1"/>
           </a:lnRef>
           <a:fillRef idx="0">
-            <a:schemeClr val="accent1"/>
+            <a:schemeClr val="dk1"/>
           </a:fillRef>
           <a:effectRef idx="1">
-            <a:schemeClr val="accent1"/>
+            <a:schemeClr val="dk1"/>
           </a:effectRef>
           <a:fontRef idx="minor">
             <a:schemeClr val="tx1"/>
@@ -4586,33 +4966,39 @@
       </p:cxnSp>
       <p:cxnSp>
         <p:nvCxnSpPr>
-          <p:cNvPr id="26" name="Connector 25"/>
-          <p:cNvCxnSpPr/>
+          <p:cNvPr id="43" name="Straight Arrow Connector 42">
+            <a:extLst>
+              <a:ext uri="{FF2B5EF4-FFF2-40B4-BE49-F238E27FC236}">
+                <a16:creationId xmlns:a16="http://schemas.microsoft.com/office/drawing/2014/main" id="{0BCDF4CC-406A-C89D-A155-2BF35382C5F2}"/>
+              </a:ext>
+            </a:extLst>
+          </p:cNvPr>
+          <p:cNvCxnSpPr>
+            <a:cxnSpLocks/>
+          </p:cNvCxnSpPr>
           <p:nvPr/>
         </p:nvCxnSpPr>
         <p:spPr>
-          <a:xfrm flipH="1">
-            <a:off x="4709160.0" y="1828800"/>
-            <a:ext cx="3017520.0" cy="411480"/>
+          <a:xfrm>
+            <a:off x="7802880" y="5122873"/>
+            <a:ext cx="521970" cy="0"/>
           </a:xfrm>
-          <a:prstGeom prst="line">
+          <a:prstGeom prst="straightConnector1">
             <a:avLst/>
           </a:prstGeom>
-          <a:ln w="19050">
-            <a:solidFill>
-              <a:srgbClr val="34495E"/>
-            </a:solidFill>
+          <a:ln>
+            <a:tailEnd type="triangle"/>
           </a:ln>
         </p:spPr>
         <p:style>
           <a:lnRef idx="2">
-            <a:schemeClr val="accent1"/>
+            <a:schemeClr val="dk1"/>
           </a:lnRef>
           <a:fillRef idx="0">
-            <a:schemeClr val="accent1"/>
+            <a:schemeClr val="dk1"/>
           </a:fillRef>
           <a:effectRef idx="1">
-            <a:schemeClr val="accent1"/>
+            <a:schemeClr val="dk1"/>
           </a:effectRef>
           <a:fontRef idx="minor">
             <a:schemeClr val="tx1"/>
@@ -4621,33 +5007,39 @@
       </p:cxnSp>
       <p:cxnSp>
         <p:nvCxnSpPr>
-          <p:cNvPr id="27" name="Connector 26"/>
-          <p:cNvCxnSpPr/>
+          <p:cNvPr id="45" name="Straight Arrow Connector 44">
+            <a:extLst>
+              <a:ext uri="{FF2B5EF4-FFF2-40B4-BE49-F238E27FC236}">
+                <a16:creationId xmlns:a16="http://schemas.microsoft.com/office/drawing/2014/main" id="{53E118CB-9E7D-2C6C-646E-464BC05FD5A4}"/>
+              </a:ext>
+            </a:extLst>
+          </p:cNvPr>
+          <p:cNvCxnSpPr>
+            <a:cxnSpLocks/>
+          </p:cNvCxnSpPr>
           <p:nvPr/>
         </p:nvCxnSpPr>
         <p:spPr>
-          <a:xfrm>
-            <a:off x="10744200.0" y="1828800"/>
-            <a:ext cx="0.0" cy="411480"/>
+          <a:xfrm flipH="1">
+            <a:off x="3453765" y="5122873"/>
+            <a:ext cx="362903" cy="0"/>
           </a:xfrm>
-          <a:prstGeom prst="line">
+          <a:prstGeom prst="straightConnector1">
             <a:avLst/>
           </a:prstGeom>
-          <a:ln w="19050">
-            <a:solidFill>
-              <a:srgbClr val="34495E"/>
-            </a:solidFill>
+          <a:ln>
+            <a:tailEnd type="triangle"/>
           </a:ln>
         </p:spPr>
         <p:style>
           <a:lnRef idx="2">
-            <a:schemeClr val="accent1"/>
+            <a:schemeClr val="dk1"/>
           </a:lnRef>
           <a:fillRef idx="0">
-            <a:schemeClr val="accent1"/>
+            <a:schemeClr val="dk1"/>
           </a:fillRef>
           <a:effectRef idx="1">
-            <a:schemeClr val="accent1"/>
+            <a:schemeClr val="dk1"/>
           </a:effectRef>
           <a:fontRef idx="minor">
             <a:schemeClr val="tx1"/>
@@ -4656,33 +5048,39 @@
       </p:cxnSp>
       <p:cxnSp>
         <p:nvCxnSpPr>
-          <p:cNvPr id="28" name="Connector 27"/>
-          <p:cNvCxnSpPr/>
+          <p:cNvPr id="40" name="Straight Arrow Connector 39">
+            <a:extLst>
+              <a:ext uri="{FF2B5EF4-FFF2-40B4-BE49-F238E27FC236}">
+                <a16:creationId xmlns:a16="http://schemas.microsoft.com/office/drawing/2014/main" id="{F59CE953-A69C-02E3-6EDA-DE43BA85AEF2}"/>
+              </a:ext>
+            </a:extLst>
+          </p:cNvPr>
+          <p:cNvCxnSpPr>
+            <a:cxnSpLocks/>
+          </p:cNvCxnSpPr>
           <p:nvPr/>
         </p:nvCxnSpPr>
         <p:spPr>
           <a:xfrm>
-            <a:off x="6035040" y="3177539.5"/>
-            <a:ext cx="3383280" cy="0.0"/>
+            <a:off x="5888039" y="1263650"/>
+            <a:ext cx="385761" cy="0"/>
           </a:xfrm>
-          <a:prstGeom prst="line">
+          <a:prstGeom prst="straightConnector1">
             <a:avLst/>
           </a:prstGeom>
-          <a:ln w="19050">
-            <a:solidFill>
-              <a:srgbClr val="34495E"/>
-            </a:solidFill>
+          <a:ln>
+            <a:tailEnd type="triangle"/>
           </a:ln>
         </p:spPr>
         <p:style>
           <a:lnRef idx="2">
-            <a:schemeClr val="accent1"/>
+            <a:schemeClr val="dk1"/>
           </a:lnRef>
           <a:fillRef idx="0">
-            <a:schemeClr val="accent1"/>
+            <a:schemeClr val="dk1"/>
           </a:fillRef>
           <a:effectRef idx="1">
-            <a:schemeClr val="accent1"/>
+            <a:schemeClr val="dk1"/>
           </a:effectRef>
           <a:fontRef idx="minor">
             <a:schemeClr val="tx1"/>
@@ -4691,179 +5089,45 @@
       </p:cxnSp>
       <p:cxnSp>
         <p:nvCxnSpPr>
-          <p:cNvPr id="29" name="Connector 28"/>
-          <p:cNvCxnSpPr/>
+          <p:cNvPr id="42" name="Straight Arrow Connector 41">
+            <a:extLst>
+              <a:ext uri="{FF2B5EF4-FFF2-40B4-BE49-F238E27FC236}">
+                <a16:creationId xmlns:a16="http://schemas.microsoft.com/office/drawing/2014/main" id="{D1018000-2838-01E9-DDFF-7012C460ED21}"/>
+              </a:ext>
+            </a:extLst>
+          </p:cNvPr>
+          <p:cNvCxnSpPr>
+            <a:cxnSpLocks/>
+          </p:cNvCxnSpPr>
           <p:nvPr/>
         </p:nvCxnSpPr>
         <p:spPr>
-          <a:xfrm flipH="1">
-            <a:off x="3017520" y="2423160"/>
-            <a:ext cx="365760" cy="2331720"/>
+          <a:xfrm>
+            <a:off x="8986839" y="1260475"/>
+            <a:ext cx="385761" cy="0"/>
           </a:xfrm>
-          <a:prstGeom prst="line">
+          <a:prstGeom prst="straightConnector1">
             <a:avLst/>
           </a:prstGeom>
-          <a:ln w="19050">
-            <a:solidFill>
-              <a:srgbClr val="34495E"/>
-            </a:solidFill>
+          <a:ln>
+            <a:tailEnd type="triangle"/>
           </a:ln>
         </p:spPr>
         <p:style>
           <a:lnRef idx="2">
-            <a:schemeClr val="accent1"/>
+            <a:schemeClr val="dk1"/>
           </a:lnRef>
           <a:fillRef idx="0">
-            <a:schemeClr val="accent1"/>
+            <a:schemeClr val="dk1"/>
           </a:fillRef>
           <a:effectRef idx="1">
-            <a:schemeClr val="accent1"/>
+            <a:schemeClr val="dk1"/>
           </a:effectRef>
           <a:fontRef idx="minor">
             <a:schemeClr val="tx1"/>
           </a:fontRef>
         </p:style>
       </p:cxnSp>
-      <p:sp>
-        <p:nvSpPr>
-          <p:cNvPr id="30" name="TextBox 29"/>
-          <p:cNvSpPr txBox="1"/>
-          <p:nvPr/>
-        </p:nvSpPr>
-        <p:spPr>
-          <a:xfrm>
-            <a:off x="5394960" y="1691640"/>
-            <a:ext cx="3108960" cy="365760"/>
-          </a:xfrm>
-          <a:prstGeom prst="rect">
-            <a:avLst/>
-          </a:prstGeom>
-          <a:noFill/>
-        </p:spPr>
-        <p:txBody>
-          <a:bodyPr wrap="none">
-            <a:spAutoFit/>
-          </a:bodyPr>
-          <a:lstStyle/>
-          <a:p>
-            <a:pPr>
-              <a:defRPr sz="1000">
-                <a:solidFill>
-                  <a:srgbClr val="34495E"/>
-                </a:solidFill>
-              </a:defRPr>
-            </a:pPr>
-            <a:r>
-              <a:t>compute features after merge (using only past sessions)</a:t>
-            </a:r>
-          </a:p>
-        </p:txBody>
-      </p:sp>
-      <p:sp>
-        <p:nvSpPr>
-          <p:cNvPr id="31" name="TextBox 30"/>
-          <p:cNvSpPr txBox="1"/>
-          <p:nvPr/>
-        </p:nvSpPr>
-        <p:spPr>
-          <a:xfrm>
-            <a:off x="9692640" y="1600200"/>
-            <a:ext cx="2194560" cy="457200"/>
-          </a:xfrm>
-          <a:prstGeom prst="rect">
-            <a:avLst/>
-          </a:prstGeom>
-          <a:noFill/>
-        </p:spPr>
-        <p:txBody>
-          <a:bodyPr wrap="none">
-            <a:spAutoFit/>
-          </a:bodyPr>
-          <a:lstStyle/>
-          <a:p>
-            <a:pPr>
-              <a:defRPr sz="1000">
-                <a:solidFill>
-                  <a:srgbClr val="34495E"/>
-                </a:solidFill>
-              </a:defRPr>
-            </a:pPr>
-            <a:r>
-              <a:t>apply temporal split &amp; evaluation</a:t>
-            </a:r>
-          </a:p>
-        </p:txBody>
-      </p:sp>
-      <p:sp>
-        <p:nvSpPr>
-          <p:cNvPr id="32" name="TextBox 31"/>
-          <p:cNvSpPr txBox="1"/>
-          <p:nvPr/>
-        </p:nvSpPr>
-        <p:spPr>
-          <a:xfrm>
-            <a:off x="1783080" y="3977639"/>
-            <a:ext cx="1371600" cy="365760"/>
-          </a:xfrm>
-          <a:prstGeom prst="rect">
-            <a:avLst/>
-          </a:prstGeom>
-          <a:noFill/>
-        </p:spPr>
-        <p:txBody>
-          <a:bodyPr wrap="none">
-            <a:spAutoFit/>
-          </a:bodyPr>
-          <a:lstStyle/>
-          <a:p>
-            <a:pPr>
-              <a:defRPr sz="1000">
-                <a:solidFill>
-                  <a:srgbClr val="34495E"/>
-                </a:solidFill>
-              </a:defRPr>
-            </a:pPr>
-            <a:r>
-              <a:t>outputs / caches</a:t>
-            </a:r>
-          </a:p>
-        </p:txBody>
-      </p:sp>
-      <p:sp>
-        <p:nvSpPr>
-          <p:cNvPr id="33" name="TextBox 32"/>
-          <p:cNvSpPr txBox="1"/>
-          <p:nvPr/>
-        </p:nvSpPr>
-        <p:spPr>
-          <a:xfrm>
-            <a:off x="365760" y="6446520"/>
-            <a:ext cx="11430000" cy="320040"/>
-          </a:xfrm>
-          <a:prstGeom prst="rect">
-            <a:avLst/>
-          </a:prstGeom>
-          <a:noFill/>
-        </p:spPr>
-        <p:txBody>
-          <a:bodyPr wrap="none">
-            <a:spAutoFit/>
-          </a:bodyPr>
-          <a:lstStyle/>
-          <a:p>
-            <a:pPr algn="ctr">
-              <a:defRPr sz="1400" i="1">
-                <a:solidFill>
-                  <a:srgbClr val="34495E"/>
-                </a:solidFill>
-              </a:defRPr>
-            </a:pPr>
-            <a:r>
-              <a:t>Dataset construction and leakage-safe feature computation workflow (VOTE-RAP).</a:t>
-            </a:r>
-          </a:p>
-        </p:txBody>
-      </p:sp>
     </p:spTree>
   </p:cSld>
   <p:clrMapOvr>
